--- a/Investigacion Inicial/Sistema de comunicaciones LoRa.pptx
+++ b/Investigacion Inicial/Sistema de comunicaciones LoRa.pptx
@@ -16,20 +16,25 @@
     <p:sldId id="263" r:id="rId10"/>
     <p:sldId id="265" r:id="rId11"/>
     <p:sldId id="266" r:id="rId12"/>
-    <p:sldId id="267" r:id="rId13"/>
-    <p:sldId id="268" r:id="rId14"/>
-    <p:sldId id="269" r:id="rId15"/>
-    <p:sldId id="270" r:id="rId16"/>
-    <p:sldId id="271" r:id="rId17"/>
-    <p:sldId id="272" r:id="rId18"/>
-    <p:sldId id="273" r:id="rId19"/>
-    <p:sldId id="274" r:id="rId20"/>
-    <p:sldId id="275" r:id="rId21"/>
-    <p:sldId id="276" r:id="rId22"/>
-    <p:sldId id="277" r:id="rId23"/>
-    <p:sldId id="278" r:id="rId24"/>
-    <p:sldId id="279" r:id="rId25"/>
-    <p:sldId id="280" r:id="rId26"/>
+    <p:sldId id="281" r:id="rId13"/>
+    <p:sldId id="282" r:id="rId14"/>
+    <p:sldId id="283" r:id="rId15"/>
+    <p:sldId id="284" r:id="rId16"/>
+    <p:sldId id="285" r:id="rId17"/>
+    <p:sldId id="267" r:id="rId18"/>
+    <p:sldId id="268" r:id="rId19"/>
+    <p:sldId id="269" r:id="rId20"/>
+    <p:sldId id="270" r:id="rId21"/>
+    <p:sldId id="271" r:id="rId22"/>
+    <p:sldId id="272" r:id="rId23"/>
+    <p:sldId id="273" r:id="rId24"/>
+    <p:sldId id="274" r:id="rId25"/>
+    <p:sldId id="275" r:id="rId26"/>
+    <p:sldId id="276" r:id="rId27"/>
+    <p:sldId id="277" r:id="rId28"/>
+    <p:sldId id="278" r:id="rId29"/>
+    <p:sldId id="279" r:id="rId30"/>
+    <p:sldId id="280" r:id="rId31"/>
   </p:sldIdLst>
   <p:sldSz cx="12192000" cy="6858000"/>
   <p:notesSz cx="6858000" cy="9144000"/>
@@ -128,6 +133,11 @@
       </a:defRPr>
     </a:lvl9pPr>
   </p:defaultTextStyle>
+  <p:extLst>
+    <p:ext uri="{EFAFB233-063F-42B5-8137-9DF3F51BA10A}">
+      <p15:sldGuideLst xmlns:p15="http://schemas.microsoft.com/office/powerpoint/2012/main"/>
+    </p:ext>
+  </p:extLst>
 </p:presentation>
 </file>
 
@@ -26681,7 +26691,7 @@
           <a:p>
             <a:fld id="{6929D6D7-CEDD-4B45-9930-3FAE4C2948BF}" type="slidenum">
               <a:rPr lang="en-US" smtClean="0"/>
-              <a:t>‹#›</a:t>
+              <a:t>‹Nº›</a:t>
             </a:fld>
             <a:endParaRPr lang="en-US"/>
           </a:p>
@@ -26889,7 +26899,7 @@
           <a:p>
             <a:fld id="{6929D6D7-CEDD-4B45-9930-3FAE4C2948BF}" type="slidenum">
               <a:rPr lang="en-US" smtClean="0"/>
-              <a:t>‹#›</a:t>
+              <a:t>‹Nº›</a:t>
             </a:fld>
             <a:endParaRPr lang="en-US"/>
           </a:p>
@@ -27145,7 +27155,7 @@
           <a:p>
             <a:fld id="{6929D6D7-CEDD-4B45-9930-3FAE4C2948BF}" type="slidenum">
               <a:rPr lang="en-US" smtClean="0"/>
-              <a:t>‹#›</a:t>
+              <a:t>‹Nº›</a:t>
             </a:fld>
             <a:endParaRPr lang="en-US"/>
           </a:p>
@@ -27319,7 +27329,7 @@
           <a:p>
             <a:fld id="{6929D6D7-CEDD-4B45-9930-3FAE4C2948BF}" type="slidenum">
               <a:rPr lang="en-US" smtClean="0"/>
-              <a:t>‹#›</a:t>
+              <a:t>‹Nº›</a:t>
             </a:fld>
             <a:endParaRPr lang="en-US"/>
           </a:p>
@@ -27662,7 +27672,7 @@
           <a:p>
             <a:fld id="{6929D6D7-CEDD-4B45-9930-3FAE4C2948BF}" type="slidenum">
               <a:rPr lang="en-US" smtClean="0"/>
-              <a:t>‹#›</a:t>
+              <a:t>‹Nº›</a:t>
             </a:fld>
             <a:endParaRPr lang="en-US"/>
           </a:p>
@@ -27937,7 +27947,7 @@
           <a:p>
             <a:fld id="{6929D6D7-CEDD-4B45-9930-3FAE4C2948BF}" type="slidenum">
               <a:rPr lang="en-US" smtClean="0"/>
-              <a:t>‹#›</a:t>
+              <a:t>‹Nº›</a:t>
             </a:fld>
             <a:endParaRPr lang="en-US"/>
           </a:p>
@@ -28316,7 +28326,7 @@
           <a:p>
             <a:fld id="{6929D6D7-CEDD-4B45-9930-3FAE4C2948BF}" type="slidenum">
               <a:rPr lang="en-US" smtClean="0"/>
-              <a:t>‹#›</a:t>
+              <a:t>‹Nº›</a:t>
             </a:fld>
             <a:endParaRPr lang="en-US"/>
           </a:p>
@@ -28434,7 +28444,7 @@
           <a:p>
             <a:fld id="{6929D6D7-CEDD-4B45-9930-3FAE4C2948BF}" type="slidenum">
               <a:rPr lang="en-US" smtClean="0"/>
-              <a:t>‹#›</a:t>
+              <a:t>‹Nº›</a:t>
             </a:fld>
             <a:endParaRPr lang="en-US"/>
           </a:p>
@@ -28613,7 +28623,7 @@
           <a:p>
             <a:fld id="{6929D6D7-CEDD-4B45-9930-3FAE4C2948BF}" type="slidenum">
               <a:rPr lang="en-US" smtClean="0"/>
-              <a:t>‹#›</a:t>
+              <a:t>‹Nº›</a:t>
             </a:fld>
             <a:endParaRPr lang="en-US"/>
           </a:p>
@@ -28980,7 +28990,7 @@
           <a:p>
             <a:fld id="{6929D6D7-CEDD-4B45-9930-3FAE4C2948BF}" type="slidenum">
               <a:rPr lang="en-US" smtClean="0"/>
-              <a:t>‹#›</a:t>
+              <a:t>‹Nº›</a:t>
             </a:fld>
             <a:endParaRPr lang="en-US"/>
           </a:p>
@@ -29341,7 +29351,7 @@
           <a:p>
             <a:fld id="{6929D6D7-CEDD-4B45-9930-3FAE4C2948BF}" type="slidenum">
               <a:rPr lang="en-US" smtClean="0"/>
-              <a:t>‹#›</a:t>
+              <a:t>‹Nº›</a:t>
             </a:fld>
             <a:endParaRPr lang="en-US"/>
           </a:p>
@@ -29660,7 +29670,7 @@
           <a:p>
             <a:fld id="{6929D6D7-CEDD-4B45-9930-3FAE4C2948BF}" type="slidenum">
               <a:rPr lang="en-US" smtClean="0"/>
-              <a:t>‹#›</a:t>
+              <a:t>‹Nº›</a:t>
             </a:fld>
             <a:endParaRPr lang="en-US"/>
           </a:p>
@@ -30834,7 +30844,18 @@
           <a:bodyPr/>
           <a:lstStyle/>
           <a:p>
-            <a:endParaRPr lang="en-US"/>
+            <a:r>
+              <a:rPr lang="en-US" dirty="0"/>
+              <a:t>¿</a:t>
+            </a:r>
+            <a:r>
+              <a:rPr lang="en-US" dirty="0" err="1"/>
+              <a:t>Qué</a:t>
+            </a:r>
+            <a:r>
+              <a:rPr lang="en-US" dirty="0"/>
+              <a:t> es LoRa?</a:t>
+            </a:r>
           </a:p>
         </p:txBody>
       </p:sp>
@@ -30859,10 +30880,172 @@
           <a:bodyPr/>
           <a:lstStyle/>
           <a:p>
-            <a:endParaRPr lang="en-US"/>
+            <a:pPr>
+              <a:buFont typeface="Arial" panose="020B0604020202020204" pitchFamily="34" charset="0"/>
+              <a:buChar char="•"/>
+            </a:pPr>
+            <a:r>
+              <a:rPr lang="en-US" dirty="0"/>
+              <a:t> Long Range.</a:t>
+            </a:r>
+          </a:p>
+          <a:p>
+            <a:pPr>
+              <a:buFont typeface="Arial" panose="020B0604020202020204" pitchFamily="34" charset="0"/>
+              <a:buChar char="•"/>
+            </a:pPr>
+            <a:r>
+              <a:rPr lang="en-US" dirty="0"/>
+              <a:t> </a:t>
+            </a:r>
+            <a:r>
+              <a:rPr lang="en-US" dirty="0" err="1"/>
+              <a:t>Patentada</a:t>
+            </a:r>
+            <a:r>
+              <a:rPr lang="en-US" dirty="0"/>
+              <a:t> </a:t>
+            </a:r>
+            <a:r>
+              <a:rPr lang="en-US" dirty="0" err="1"/>
+              <a:t>por</a:t>
+            </a:r>
+            <a:r>
+              <a:rPr lang="en-US" dirty="0"/>
+              <a:t> </a:t>
+            </a:r>
+            <a:r>
+              <a:rPr lang="en-US" dirty="0" err="1"/>
+              <a:t>Cycleo</a:t>
+            </a:r>
+            <a:r>
+              <a:rPr lang="en-US" dirty="0"/>
+              <a:t>, </a:t>
+            </a:r>
+            <a:r>
+              <a:rPr lang="en-US" dirty="0" err="1"/>
+              <a:t>adquirida</a:t>
+            </a:r>
+            <a:r>
+              <a:rPr lang="en-US" dirty="0"/>
+              <a:t> </a:t>
+            </a:r>
+            <a:r>
+              <a:rPr lang="en-US" dirty="0" err="1"/>
+              <a:t>por</a:t>
+            </a:r>
+            <a:r>
+              <a:rPr lang="en-US" dirty="0"/>
+              <a:t> Semtech.</a:t>
+            </a:r>
+          </a:p>
+          <a:p>
+            <a:pPr>
+              <a:buFont typeface="Arial" panose="020B0604020202020204" pitchFamily="34" charset="0"/>
+              <a:buChar char="•"/>
+            </a:pPr>
+            <a:r>
+              <a:rPr lang="en-US" dirty="0"/>
+              <a:t> </a:t>
+            </a:r>
+            <a:r>
+              <a:rPr lang="en-US" dirty="0" err="1"/>
+              <a:t>Modulación</a:t>
+            </a:r>
+            <a:r>
+              <a:rPr lang="en-US" dirty="0"/>
+              <a:t> de </a:t>
+            </a:r>
+            <a:r>
+              <a:rPr lang="en-US" dirty="0" err="1"/>
+              <a:t>espectro</a:t>
+            </a:r>
+            <a:r>
+              <a:rPr lang="en-US" dirty="0"/>
+              <a:t> </a:t>
+            </a:r>
+            <a:r>
+              <a:rPr lang="en-US" dirty="0" err="1"/>
+              <a:t>ensanchado</a:t>
+            </a:r>
+            <a:r>
+              <a:rPr lang="en-US" dirty="0"/>
+              <a:t>. (CSS)</a:t>
+            </a:r>
+          </a:p>
+          <a:p>
+            <a:pPr>
+              <a:buFont typeface="Arial" panose="020B0604020202020204" pitchFamily="34" charset="0"/>
+              <a:buChar char="•"/>
+            </a:pPr>
+            <a:r>
+              <a:rPr lang="en-US" dirty="0"/>
+              <a:t> Baja </a:t>
+            </a:r>
+            <a:r>
+              <a:rPr lang="en-US" dirty="0" err="1"/>
+              <a:t>potencia</a:t>
+            </a:r>
+            <a:r>
+              <a:rPr lang="en-US" dirty="0"/>
+              <a:t>.</a:t>
+            </a:r>
+          </a:p>
+          <a:p>
+            <a:pPr marL="0" indent="0">
+              <a:buNone/>
+            </a:pPr>
+            <a:endParaRPr lang="en-US" dirty="0"/>
           </a:p>
         </p:txBody>
       </p:sp>
+      <p:pic>
+        <p:nvPicPr>
+          <p:cNvPr id="1026" name="Picture 2" descr="LoRa - Wikipedia, la enciclopedia libre">
+            <a:extLst>
+              <a:ext uri="{FF2B5EF4-FFF2-40B4-BE49-F238E27FC236}">
+                <a16:creationId xmlns:a16="http://schemas.microsoft.com/office/drawing/2014/main" id="{0FFB5AFA-794B-E8F9-64E4-93FBA58A45B9}"/>
+              </a:ext>
+            </a:extLst>
+          </p:cNvPr>
+          <p:cNvPicPr>
+            <a:picLocks noChangeAspect="1" noChangeArrowheads="1"/>
+          </p:cNvPicPr>
+          <p:nvPr/>
+        </p:nvPicPr>
+        <p:blipFill>
+          <a:blip r:embed="rId2">
+            <a:extLst>
+              <a:ext uri="{28A0092B-C50C-407E-A947-70E740481C1C}">
+                <a14:useLocalDpi xmlns:a14="http://schemas.microsoft.com/office/drawing/2010/main" val="0"/>
+              </a:ext>
+            </a:extLst>
+          </a:blip>
+          <a:srcRect/>
+          <a:stretch>
+            <a:fillRect/>
+          </a:stretch>
+        </p:blipFill>
+        <p:spPr bwMode="auto">
+          <a:xfrm>
+            <a:off x="7669047" y="988906"/>
+            <a:ext cx="3287712" cy="4750139"/>
+          </a:xfrm>
+          <a:prstGeom prst="rect">
+            <a:avLst/>
+          </a:prstGeom>
+          <a:noFill/>
+          <a:extLst>
+            <a:ext uri="{909E8E84-426E-40DD-AFC4-6F175D3DCCD1}">
+              <a14:hiddenFill xmlns:a14="http://schemas.microsoft.com/office/drawing/2010/main">
+                <a:solidFill>
+                  <a:srgbClr val="FFFFFF"/>
+                </a:solidFill>
+              </a14:hiddenFill>
+            </a:ext>
+          </a:extLst>
+        </p:spPr>
+      </p:pic>
     </p:spTree>
     <p:extLst>
       <p:ext uri="{BB962C8B-B14F-4D97-AF65-F5344CB8AC3E}">
@@ -30877,6 +31060,936 @@
 </file>
 
 <file path=ppt/slides/slide12.xml><?xml version="1.0" encoding="utf-8"?>
+<p:sld xmlns:a="http://schemas.openxmlformats.org/drawingml/2006/main" xmlns:r="http://schemas.openxmlformats.org/officeDocument/2006/relationships" xmlns:p="http://schemas.openxmlformats.org/presentationml/2006/main">
+  <p:cSld>
+    <p:spTree>
+      <p:nvGrpSpPr>
+        <p:cNvPr id="1" name=""/>
+        <p:cNvGrpSpPr/>
+        <p:nvPr/>
+      </p:nvGrpSpPr>
+      <p:grpSpPr>
+        <a:xfrm>
+          <a:off x="0" y="0"/>
+          <a:ext cx="0" cy="0"/>
+          <a:chOff x="0" y="0"/>
+          <a:chExt cx="0" cy="0"/>
+        </a:xfrm>
+      </p:grpSpPr>
+      <p:sp>
+        <p:nvSpPr>
+          <p:cNvPr id="2" name="Título 1">
+            <a:extLst>
+              <a:ext uri="{FF2B5EF4-FFF2-40B4-BE49-F238E27FC236}">
+                <a16:creationId xmlns:a16="http://schemas.microsoft.com/office/drawing/2014/main" id="{3969630E-790F-B20D-0532-9414B7080288}"/>
+              </a:ext>
+            </a:extLst>
+          </p:cNvPr>
+          <p:cNvSpPr>
+            <a:spLocks noGrp="1"/>
+          </p:cNvSpPr>
+          <p:nvPr>
+            <p:ph type="title"/>
+          </p:nvPr>
+        </p:nvSpPr>
+        <p:spPr/>
+        <p:txBody>
+          <a:bodyPr/>
+          <a:lstStyle/>
+          <a:p>
+            <a:r>
+              <a:rPr lang="es-CR" dirty="0"/>
+              <a:t>¿Qué frecuencias utiliza?</a:t>
+            </a:r>
+          </a:p>
+        </p:txBody>
+      </p:sp>
+      <p:sp>
+        <p:nvSpPr>
+          <p:cNvPr id="3" name="Marcador de contenido 2">
+            <a:extLst>
+              <a:ext uri="{FF2B5EF4-FFF2-40B4-BE49-F238E27FC236}">
+                <a16:creationId xmlns:a16="http://schemas.microsoft.com/office/drawing/2014/main" id="{C36D6E92-C3DE-9DC3-F440-F5D411EC4A24}"/>
+              </a:ext>
+            </a:extLst>
+          </p:cNvPr>
+          <p:cNvSpPr>
+            <a:spLocks noGrp="1"/>
+          </p:cNvSpPr>
+          <p:nvPr>
+            <p:ph idx="1"/>
+          </p:nvPr>
+        </p:nvSpPr>
+        <p:spPr/>
+        <p:txBody>
+          <a:bodyPr/>
+          <a:lstStyle/>
+          <a:p>
+            <a:r>
+              <a:rPr lang="es-CR" dirty="0"/>
+              <a:t>Frecuencias de trabajo por continente:</a:t>
+            </a:r>
+          </a:p>
+          <a:p>
+            <a:pPr>
+              <a:buFont typeface="Arial" panose="020B0604020202020204" pitchFamily="34" charset="0"/>
+              <a:buChar char="•"/>
+            </a:pPr>
+            <a:r>
+              <a:rPr lang="es-CR" dirty="0"/>
+              <a:t> 868 MHz en Europa.</a:t>
+            </a:r>
+          </a:p>
+          <a:p>
+            <a:pPr>
+              <a:buFont typeface="Arial" panose="020B0604020202020204" pitchFamily="34" charset="0"/>
+              <a:buChar char="•"/>
+            </a:pPr>
+            <a:r>
+              <a:rPr lang="es-CR" dirty="0"/>
+              <a:t> 915 MHz en América.</a:t>
+            </a:r>
+          </a:p>
+          <a:p>
+            <a:pPr>
+              <a:buFont typeface="Arial" panose="020B0604020202020204" pitchFamily="34" charset="0"/>
+              <a:buChar char="•"/>
+            </a:pPr>
+            <a:r>
+              <a:rPr lang="es-CR" dirty="0"/>
+              <a:t> 433 MHz en Asia.</a:t>
+            </a:r>
+          </a:p>
+          <a:p>
+            <a:pPr>
+              <a:buFont typeface="Arial" panose="020B0604020202020204" pitchFamily="34" charset="0"/>
+              <a:buChar char="•"/>
+            </a:pPr>
+            <a:r>
+              <a:rPr lang="es-CR" dirty="0"/>
+              <a:t>Son bandas cercanas a los GHz.</a:t>
+            </a:r>
+            <a:br>
+              <a:rPr lang="es-CR" dirty="0"/>
+            </a:br>
+            <a:r>
+              <a:rPr lang="es-CR" dirty="0"/>
+              <a:t>Bandas de uso libre.</a:t>
+            </a:r>
+          </a:p>
+        </p:txBody>
+      </p:sp>
+      <p:pic>
+        <p:nvPicPr>
+          <p:cNvPr id="2050" name="Picture 2" descr="Espectro caro desconecta inversión, empleos y sana competencia">
+            <a:extLst>
+              <a:ext uri="{FF2B5EF4-FFF2-40B4-BE49-F238E27FC236}">
+                <a16:creationId xmlns:a16="http://schemas.microsoft.com/office/drawing/2014/main" id="{EDDD394A-BBE0-DE04-9F3E-44E7E82E89D6}"/>
+              </a:ext>
+            </a:extLst>
+          </p:cNvPr>
+          <p:cNvPicPr>
+            <a:picLocks noChangeAspect="1" noChangeArrowheads="1"/>
+          </p:cNvPicPr>
+          <p:nvPr/>
+        </p:nvPicPr>
+        <p:blipFill>
+          <a:blip r:embed="rId2">
+            <a:extLst>
+              <a:ext uri="{28A0092B-C50C-407E-A947-70E740481C1C}">
+                <a14:useLocalDpi xmlns:a14="http://schemas.microsoft.com/office/drawing/2010/main" val="0"/>
+              </a:ext>
+            </a:extLst>
+          </a:blip>
+          <a:srcRect/>
+          <a:stretch>
+            <a:fillRect/>
+          </a:stretch>
+        </p:blipFill>
+        <p:spPr bwMode="auto">
+          <a:xfrm>
+            <a:off x="6126480" y="2068317"/>
+            <a:ext cx="5532521" cy="3319513"/>
+          </a:xfrm>
+          <a:prstGeom prst="rect">
+            <a:avLst/>
+          </a:prstGeom>
+          <a:noFill/>
+          <a:extLst>
+            <a:ext uri="{909E8E84-426E-40DD-AFC4-6F175D3DCCD1}">
+              <a14:hiddenFill xmlns:a14="http://schemas.microsoft.com/office/drawing/2010/main">
+                <a:solidFill>
+                  <a:srgbClr val="FFFFFF"/>
+                </a:solidFill>
+              </a14:hiddenFill>
+            </a:ext>
+          </a:extLst>
+        </p:spPr>
+      </p:pic>
+    </p:spTree>
+    <p:extLst>
+      <p:ext uri="{BB962C8B-B14F-4D97-AF65-F5344CB8AC3E}">
+        <p14:creationId xmlns:p14="http://schemas.microsoft.com/office/powerpoint/2010/main" val="2351445568"/>
+      </p:ext>
+    </p:extLst>
+  </p:cSld>
+  <p:clrMapOvr>
+    <a:masterClrMapping/>
+  </p:clrMapOvr>
+</p:sld>
+</file>
+
+<file path=ppt/slides/slide13.xml><?xml version="1.0" encoding="utf-8"?>
+<p:sld xmlns:a="http://schemas.openxmlformats.org/drawingml/2006/main" xmlns:r="http://schemas.openxmlformats.org/officeDocument/2006/relationships" xmlns:p="http://schemas.openxmlformats.org/presentationml/2006/main">
+  <p:cSld>
+    <p:spTree>
+      <p:nvGrpSpPr>
+        <p:cNvPr id="1" name=""/>
+        <p:cNvGrpSpPr/>
+        <p:nvPr/>
+      </p:nvGrpSpPr>
+      <p:grpSpPr>
+        <a:xfrm>
+          <a:off x="0" y="0"/>
+          <a:ext cx="0" cy="0"/>
+          <a:chOff x="0" y="0"/>
+          <a:chExt cx="0" cy="0"/>
+        </a:xfrm>
+      </p:grpSpPr>
+      <p:sp>
+        <p:nvSpPr>
+          <p:cNvPr id="2" name="Título 1">
+            <a:extLst>
+              <a:ext uri="{FF2B5EF4-FFF2-40B4-BE49-F238E27FC236}">
+                <a16:creationId xmlns:a16="http://schemas.microsoft.com/office/drawing/2014/main" id="{A468D712-517F-18E5-E8B2-17FFFDCE5B22}"/>
+              </a:ext>
+            </a:extLst>
+          </p:cNvPr>
+          <p:cNvSpPr>
+            <a:spLocks noGrp="1"/>
+          </p:cNvSpPr>
+          <p:nvPr>
+            <p:ph type="title"/>
+          </p:nvPr>
+        </p:nvSpPr>
+        <p:spPr/>
+        <p:txBody>
+          <a:bodyPr/>
+          <a:lstStyle/>
+          <a:p>
+            <a:r>
+              <a:rPr lang="es-CR" dirty="0"/>
+              <a:t>Aplicaciones</a:t>
+            </a:r>
+          </a:p>
+        </p:txBody>
+      </p:sp>
+      <p:sp>
+        <p:nvSpPr>
+          <p:cNvPr id="3" name="Marcador de contenido 2">
+            <a:extLst>
+              <a:ext uri="{FF2B5EF4-FFF2-40B4-BE49-F238E27FC236}">
+                <a16:creationId xmlns:a16="http://schemas.microsoft.com/office/drawing/2014/main" id="{C2CBBCA3-DF0E-484B-9720-55802C65F4E5}"/>
+              </a:ext>
+            </a:extLst>
+          </p:cNvPr>
+          <p:cNvSpPr>
+            <a:spLocks noGrp="1"/>
+          </p:cNvSpPr>
+          <p:nvPr>
+            <p:ph idx="1"/>
+          </p:nvPr>
+        </p:nvSpPr>
+        <p:spPr/>
+        <p:txBody>
+          <a:bodyPr/>
+          <a:lstStyle/>
+          <a:p>
+            <a:pPr>
+              <a:buFont typeface="Arial" panose="020B0604020202020204" pitchFamily="34" charset="0"/>
+              <a:buChar char="•"/>
+            </a:pPr>
+            <a:r>
+              <a:rPr lang="es-MX" dirty="0"/>
+              <a:t> Mejorar la conservación del medio ambiente. </a:t>
+            </a:r>
+          </a:p>
+          <a:p>
+            <a:pPr>
+              <a:buFont typeface="Arial" panose="020B0604020202020204" pitchFamily="34" charset="0"/>
+              <a:buChar char="•"/>
+            </a:pPr>
+            <a:r>
+              <a:rPr lang="es-MX" dirty="0"/>
+              <a:t> Prevención contra la deforestación.    </a:t>
+            </a:r>
+          </a:p>
+          <a:p>
+            <a:pPr>
+              <a:buFont typeface="Arial" panose="020B0604020202020204" pitchFamily="34" charset="0"/>
+              <a:buChar char="•"/>
+            </a:pPr>
+            <a:r>
+              <a:rPr lang="es-MX" dirty="0"/>
+              <a:t> Protección del medio. </a:t>
+            </a:r>
+          </a:p>
+          <a:p>
+            <a:pPr>
+              <a:buFont typeface="Arial" panose="020B0604020202020204" pitchFamily="34" charset="0"/>
+              <a:buChar char="•"/>
+            </a:pPr>
+            <a:r>
+              <a:rPr lang="es-MX" dirty="0"/>
+              <a:t>Preservación de la biodiversidad. </a:t>
+            </a:r>
+          </a:p>
+          <a:p>
+            <a:pPr>
+              <a:buFont typeface="Arial" panose="020B0604020202020204" pitchFamily="34" charset="0"/>
+              <a:buChar char="•"/>
+            </a:pPr>
+            <a:r>
+              <a:rPr lang="es-MX" dirty="0"/>
+              <a:t> Monitoreo de la polución.</a:t>
+            </a:r>
+          </a:p>
+          <a:p>
+            <a:pPr>
+              <a:buFont typeface="Arial" panose="020B0604020202020204" pitchFamily="34" charset="0"/>
+              <a:buChar char="•"/>
+            </a:pPr>
+            <a:r>
+              <a:rPr lang="es-MX" dirty="0"/>
+              <a:t>Ciudades inteligentes.</a:t>
+            </a:r>
+            <a:endParaRPr lang="es-CR" dirty="0"/>
+          </a:p>
+        </p:txBody>
+      </p:sp>
+      <p:pic>
+        <p:nvPicPr>
+          <p:cNvPr id="3074" name="Picture 2" descr="Más allá de ciudades inteligentes: Cómo aprovechar la 5G en servicios  municipales | CR Hoy">
+            <a:extLst>
+              <a:ext uri="{FF2B5EF4-FFF2-40B4-BE49-F238E27FC236}">
+                <a16:creationId xmlns:a16="http://schemas.microsoft.com/office/drawing/2014/main" id="{CA9DB3B6-94EF-1B9E-330F-3DADB9CB0C30}"/>
+              </a:ext>
+            </a:extLst>
+          </p:cNvPr>
+          <p:cNvPicPr>
+            <a:picLocks noChangeAspect="1" noChangeArrowheads="1"/>
+          </p:cNvPicPr>
+          <p:nvPr/>
+        </p:nvPicPr>
+        <p:blipFill>
+          <a:blip r:embed="rId2">
+            <a:extLst>
+              <a:ext uri="{28A0092B-C50C-407E-A947-70E740481C1C}">
+                <a14:useLocalDpi xmlns:a14="http://schemas.microsoft.com/office/drawing/2010/main" val="0"/>
+              </a:ext>
+            </a:extLst>
+          </a:blip>
+          <a:srcRect/>
+          <a:stretch>
+            <a:fillRect/>
+          </a:stretch>
+        </p:blipFill>
+        <p:spPr bwMode="auto">
+          <a:xfrm>
+            <a:off x="6609347" y="2273256"/>
+            <a:ext cx="5193631" cy="2847385"/>
+          </a:xfrm>
+          <a:prstGeom prst="rect">
+            <a:avLst/>
+          </a:prstGeom>
+          <a:noFill/>
+          <a:extLst>
+            <a:ext uri="{909E8E84-426E-40DD-AFC4-6F175D3DCCD1}">
+              <a14:hiddenFill xmlns:a14="http://schemas.microsoft.com/office/drawing/2010/main">
+                <a:solidFill>
+                  <a:srgbClr val="FFFFFF"/>
+                </a:solidFill>
+              </a14:hiddenFill>
+            </a:ext>
+          </a:extLst>
+        </p:spPr>
+      </p:pic>
+    </p:spTree>
+    <p:extLst>
+      <p:ext uri="{BB962C8B-B14F-4D97-AF65-F5344CB8AC3E}">
+        <p14:creationId xmlns:p14="http://schemas.microsoft.com/office/powerpoint/2010/main" val="3888102707"/>
+      </p:ext>
+    </p:extLst>
+  </p:cSld>
+  <p:clrMapOvr>
+    <a:masterClrMapping/>
+  </p:clrMapOvr>
+</p:sld>
+</file>
+
+<file path=ppt/slides/slide14.xml><?xml version="1.0" encoding="utf-8"?>
+<p:sld xmlns:a="http://schemas.openxmlformats.org/drawingml/2006/main" xmlns:r="http://schemas.openxmlformats.org/officeDocument/2006/relationships" xmlns:p="http://schemas.openxmlformats.org/presentationml/2006/main">
+  <p:cSld>
+    <p:spTree>
+      <p:nvGrpSpPr>
+        <p:cNvPr id="1" name=""/>
+        <p:cNvGrpSpPr/>
+        <p:nvPr/>
+      </p:nvGrpSpPr>
+      <p:grpSpPr>
+        <a:xfrm>
+          <a:off x="0" y="0"/>
+          <a:ext cx="0" cy="0"/>
+          <a:chOff x="0" y="0"/>
+          <a:chExt cx="0" cy="0"/>
+        </a:xfrm>
+      </p:grpSpPr>
+      <p:sp>
+        <p:nvSpPr>
+          <p:cNvPr id="2" name="Título 1">
+            <a:extLst>
+              <a:ext uri="{FF2B5EF4-FFF2-40B4-BE49-F238E27FC236}">
+                <a16:creationId xmlns:a16="http://schemas.microsoft.com/office/drawing/2014/main" id="{9EBA4208-8E83-7ACB-B885-EB34433C55FE}"/>
+              </a:ext>
+            </a:extLst>
+          </p:cNvPr>
+          <p:cNvSpPr>
+            <a:spLocks noGrp="1"/>
+          </p:cNvSpPr>
+          <p:nvPr>
+            <p:ph type="title"/>
+          </p:nvPr>
+        </p:nvSpPr>
+        <p:spPr/>
+        <p:txBody>
+          <a:bodyPr/>
+          <a:lstStyle/>
+          <a:p>
+            <a:r>
+              <a:rPr lang="es-CR" dirty="0"/>
+              <a:t>Disponibilidad</a:t>
+            </a:r>
+          </a:p>
+        </p:txBody>
+      </p:sp>
+      <p:sp>
+        <p:nvSpPr>
+          <p:cNvPr id="3" name="Marcador de contenido 2">
+            <a:extLst>
+              <a:ext uri="{FF2B5EF4-FFF2-40B4-BE49-F238E27FC236}">
+                <a16:creationId xmlns:a16="http://schemas.microsoft.com/office/drawing/2014/main" id="{6EC4A25D-CB44-8C21-57BA-B53B1FCE04E3}"/>
+              </a:ext>
+            </a:extLst>
+          </p:cNvPr>
+          <p:cNvSpPr>
+            <a:spLocks noGrp="1"/>
+          </p:cNvSpPr>
+          <p:nvPr>
+            <p:ph idx="1"/>
+          </p:nvPr>
+        </p:nvSpPr>
+        <p:spPr/>
+        <p:txBody>
+          <a:bodyPr/>
+          <a:lstStyle/>
+          <a:p>
+            <a:pPr>
+              <a:buFont typeface="Arial" panose="020B0604020202020204" pitchFamily="34" charset="0"/>
+              <a:buChar char="•"/>
+            </a:pPr>
+            <a:r>
+              <a:rPr lang="es-CR" dirty="0"/>
+              <a:t> </a:t>
+            </a:r>
+            <a:r>
+              <a:rPr lang="es-CR" dirty="0" err="1"/>
+              <a:t>Lilygo</a:t>
+            </a:r>
+            <a:r>
+              <a:rPr lang="es-CR" dirty="0"/>
+              <a:t> SX1276 ESP32 </a:t>
+            </a:r>
+            <a:r>
+              <a:rPr lang="es-CR" dirty="0" err="1"/>
+              <a:t>LoRa</a:t>
+            </a:r>
+            <a:r>
+              <a:rPr lang="es-CR" dirty="0"/>
+              <a:t> 915 MHz OLED 0.96. </a:t>
+            </a:r>
+          </a:p>
+          <a:p>
+            <a:pPr>
+              <a:buFont typeface="Arial" panose="020B0604020202020204" pitchFamily="34" charset="0"/>
+              <a:buChar char="•"/>
+            </a:pPr>
+            <a:r>
+              <a:rPr lang="es-CR" dirty="0"/>
+              <a:t> </a:t>
+            </a:r>
+            <a:r>
+              <a:rPr lang="es-CR" dirty="0" err="1"/>
+              <a:t>Lilygo</a:t>
+            </a:r>
+            <a:r>
+              <a:rPr lang="es-CR" dirty="0"/>
+              <a:t> TTGO LoRa32 433 MHz V1.6.1   </a:t>
+            </a:r>
+          </a:p>
+          <a:p>
+            <a:pPr>
+              <a:buFont typeface="Arial" panose="020B0604020202020204" pitchFamily="34" charset="0"/>
+              <a:buChar char="•"/>
+            </a:pPr>
+            <a:r>
+              <a:rPr lang="es-CR" dirty="0"/>
+              <a:t> </a:t>
+            </a:r>
+            <a:r>
+              <a:rPr lang="es-CR" dirty="0" err="1"/>
+              <a:t>Heltec</a:t>
+            </a:r>
+            <a:r>
+              <a:rPr lang="es-CR" dirty="0"/>
+              <a:t> ESP32 </a:t>
+            </a:r>
+            <a:r>
+              <a:rPr lang="es-CR" dirty="0" err="1"/>
+              <a:t>LoRa</a:t>
+            </a:r>
+            <a:r>
+              <a:rPr lang="es-CR" dirty="0"/>
+              <a:t> V3 915 MHz SX1262</a:t>
+            </a:r>
+          </a:p>
+          <a:p>
+            <a:pPr>
+              <a:buFont typeface="Arial" panose="020B0604020202020204" pitchFamily="34" charset="0"/>
+              <a:buChar char="•"/>
+            </a:pPr>
+            <a:r>
+              <a:rPr lang="es-CR" dirty="0"/>
+              <a:t> </a:t>
+            </a:r>
+            <a:r>
+              <a:rPr lang="es-CR" dirty="0" err="1"/>
+              <a:t>Firebeetle</a:t>
+            </a:r>
+            <a:r>
+              <a:rPr lang="es-CR" dirty="0"/>
+              <a:t> </a:t>
+            </a:r>
+            <a:r>
+              <a:rPr lang="es-CR" dirty="0" err="1"/>
+              <a:t>LoRa</a:t>
+            </a:r>
+            <a:r>
+              <a:rPr lang="es-CR" dirty="0"/>
+              <a:t> ESP32 </a:t>
+            </a:r>
+            <a:r>
+              <a:rPr lang="es-CR" dirty="0" err="1"/>
+              <a:t>DFRobot</a:t>
+            </a:r>
+            <a:endParaRPr lang="es-CR" dirty="0"/>
+          </a:p>
+        </p:txBody>
+      </p:sp>
+      <p:pic>
+        <p:nvPicPr>
+          <p:cNvPr id="4098" name="Picture 2" descr="1.3 Investigación de mercados en línea – Mercadotecnia Electrónica">
+            <a:extLst>
+              <a:ext uri="{FF2B5EF4-FFF2-40B4-BE49-F238E27FC236}">
+                <a16:creationId xmlns:a16="http://schemas.microsoft.com/office/drawing/2014/main" id="{BBDBFFD8-EA5C-086D-0AE2-6B3E95AEEA8C}"/>
+              </a:ext>
+            </a:extLst>
+          </p:cNvPr>
+          <p:cNvPicPr>
+            <a:picLocks noChangeAspect="1" noChangeArrowheads="1"/>
+          </p:cNvPicPr>
+          <p:nvPr/>
+        </p:nvPicPr>
+        <p:blipFill>
+          <a:blip r:embed="rId2">
+            <a:extLst>
+              <a:ext uri="{28A0092B-C50C-407E-A947-70E740481C1C}">
+                <a14:useLocalDpi xmlns:a14="http://schemas.microsoft.com/office/drawing/2010/main" val="0"/>
+              </a:ext>
+            </a:extLst>
+          </a:blip>
+          <a:srcRect/>
+          <a:stretch>
+            <a:fillRect/>
+          </a:stretch>
+        </p:blipFill>
+        <p:spPr bwMode="auto">
+          <a:xfrm>
+            <a:off x="7853363" y="2757276"/>
+            <a:ext cx="3800475" cy="2200275"/>
+          </a:xfrm>
+          <a:prstGeom prst="rect">
+            <a:avLst/>
+          </a:prstGeom>
+          <a:noFill/>
+          <a:extLst>
+            <a:ext uri="{909E8E84-426E-40DD-AFC4-6F175D3DCCD1}">
+              <a14:hiddenFill xmlns:a14="http://schemas.microsoft.com/office/drawing/2010/main">
+                <a:solidFill>
+                  <a:srgbClr val="FFFFFF"/>
+                </a:solidFill>
+              </a14:hiddenFill>
+            </a:ext>
+          </a:extLst>
+        </p:spPr>
+      </p:pic>
+    </p:spTree>
+    <p:extLst>
+      <p:ext uri="{BB962C8B-B14F-4D97-AF65-F5344CB8AC3E}">
+        <p14:creationId xmlns:p14="http://schemas.microsoft.com/office/powerpoint/2010/main" val="3771228241"/>
+      </p:ext>
+    </p:extLst>
+  </p:cSld>
+  <p:clrMapOvr>
+    <a:masterClrMapping/>
+  </p:clrMapOvr>
+</p:sld>
+</file>
+
+<file path=ppt/slides/slide15.xml><?xml version="1.0" encoding="utf-8"?>
+<p:sld xmlns:a="http://schemas.openxmlformats.org/drawingml/2006/main" xmlns:r="http://schemas.openxmlformats.org/officeDocument/2006/relationships" xmlns:p="http://schemas.openxmlformats.org/presentationml/2006/main">
+  <p:cSld>
+    <p:spTree>
+      <p:nvGrpSpPr>
+        <p:cNvPr id="1" name=""/>
+        <p:cNvGrpSpPr/>
+        <p:nvPr/>
+      </p:nvGrpSpPr>
+      <p:grpSpPr>
+        <a:xfrm>
+          <a:off x="0" y="0"/>
+          <a:ext cx="0" cy="0"/>
+          <a:chOff x="0" y="0"/>
+          <a:chExt cx="0" cy="0"/>
+        </a:xfrm>
+      </p:grpSpPr>
+      <p:sp>
+        <p:nvSpPr>
+          <p:cNvPr id="2" name="Título 1">
+            <a:extLst>
+              <a:ext uri="{FF2B5EF4-FFF2-40B4-BE49-F238E27FC236}">
+                <a16:creationId xmlns:a16="http://schemas.microsoft.com/office/drawing/2014/main" id="{9ABAC272-4788-16F1-3531-335F2B45C9AB}"/>
+              </a:ext>
+            </a:extLst>
+          </p:cNvPr>
+          <p:cNvSpPr>
+            <a:spLocks noGrp="1"/>
+          </p:cNvSpPr>
+          <p:nvPr>
+            <p:ph type="title"/>
+          </p:nvPr>
+        </p:nvSpPr>
+        <p:spPr/>
+        <p:txBody>
+          <a:bodyPr/>
+          <a:lstStyle/>
+          <a:p>
+            <a:r>
+              <a:rPr lang="es-CR" dirty="0"/>
+              <a:t>Arquitectura de red</a:t>
+            </a:r>
+          </a:p>
+        </p:txBody>
+      </p:sp>
+      <p:pic>
+        <p:nvPicPr>
+          <p:cNvPr id="5" name="Marcador de contenido 4">
+            <a:extLst>
+              <a:ext uri="{FF2B5EF4-FFF2-40B4-BE49-F238E27FC236}">
+                <a16:creationId xmlns:a16="http://schemas.microsoft.com/office/drawing/2014/main" id="{037B70A2-60E8-E9A7-378D-B89EF107481A}"/>
+              </a:ext>
+            </a:extLst>
+          </p:cNvPr>
+          <p:cNvPicPr>
+            <a:picLocks noGrp="1" noChangeAspect="1"/>
+          </p:cNvPicPr>
+          <p:nvPr>
+            <p:ph idx="1"/>
+          </p:nvPr>
+        </p:nvPicPr>
+        <p:blipFill>
+          <a:blip r:embed="rId2">
+            <a:extLst>
+              <a:ext uri="{28A0092B-C50C-407E-A947-70E740481C1C}">
+                <a14:useLocalDpi xmlns:a14="http://schemas.microsoft.com/office/drawing/2010/main" val="0"/>
+              </a:ext>
+            </a:extLst>
+          </a:blip>
+          <a:stretch>
+            <a:fillRect/>
+          </a:stretch>
+        </p:blipFill>
+        <p:spPr>
+          <a:xfrm>
+            <a:off x="1944688" y="2252663"/>
+            <a:ext cx="8362950" cy="3209925"/>
+          </a:xfrm>
+          <a:prstGeom prst="rect">
+            <a:avLst/>
+          </a:prstGeom>
+        </p:spPr>
+      </p:pic>
+    </p:spTree>
+    <p:extLst>
+      <p:ext uri="{BB962C8B-B14F-4D97-AF65-F5344CB8AC3E}">
+        <p14:creationId xmlns:p14="http://schemas.microsoft.com/office/powerpoint/2010/main" val="2144200609"/>
+      </p:ext>
+    </p:extLst>
+  </p:cSld>
+  <p:clrMapOvr>
+    <a:masterClrMapping/>
+  </p:clrMapOvr>
+</p:sld>
+</file>
+
+<file path=ppt/slides/slide16.xml><?xml version="1.0" encoding="utf-8"?>
+<p:sld xmlns:a="http://schemas.openxmlformats.org/drawingml/2006/main" xmlns:r="http://schemas.openxmlformats.org/officeDocument/2006/relationships" xmlns:p="http://schemas.openxmlformats.org/presentationml/2006/main">
+  <p:cSld>
+    <p:spTree>
+      <p:nvGrpSpPr>
+        <p:cNvPr id="1" name=""/>
+        <p:cNvGrpSpPr/>
+        <p:nvPr/>
+      </p:nvGrpSpPr>
+      <p:grpSpPr>
+        <a:xfrm>
+          <a:off x="0" y="0"/>
+          <a:ext cx="0" cy="0"/>
+          <a:chOff x="0" y="0"/>
+          <a:chExt cx="0" cy="0"/>
+        </a:xfrm>
+      </p:grpSpPr>
+      <p:sp>
+        <p:nvSpPr>
+          <p:cNvPr id="2" name="Título 1">
+            <a:extLst>
+              <a:ext uri="{FF2B5EF4-FFF2-40B4-BE49-F238E27FC236}">
+                <a16:creationId xmlns:a16="http://schemas.microsoft.com/office/drawing/2014/main" id="{3440CB3E-DEED-ED5B-CEF8-B47EFE633EAE}"/>
+              </a:ext>
+            </a:extLst>
+          </p:cNvPr>
+          <p:cNvSpPr>
+            <a:spLocks noGrp="1"/>
+          </p:cNvSpPr>
+          <p:nvPr>
+            <p:ph type="title"/>
+          </p:nvPr>
+        </p:nvSpPr>
+        <p:spPr/>
+        <p:txBody>
+          <a:bodyPr/>
+          <a:lstStyle/>
+          <a:p>
+            <a:r>
+              <a:rPr lang="es-CR" dirty="0"/>
+              <a:t>Capa física y enlace</a:t>
+            </a:r>
+          </a:p>
+        </p:txBody>
+      </p:sp>
+      <p:sp>
+        <p:nvSpPr>
+          <p:cNvPr id="3" name="Marcador de contenido 2">
+            <a:extLst>
+              <a:ext uri="{FF2B5EF4-FFF2-40B4-BE49-F238E27FC236}">
+                <a16:creationId xmlns:a16="http://schemas.microsoft.com/office/drawing/2014/main" id="{D6333619-0C90-4872-0765-C86B73FFD28A}"/>
+              </a:ext>
+            </a:extLst>
+          </p:cNvPr>
+          <p:cNvSpPr>
+            <a:spLocks noGrp="1"/>
+          </p:cNvSpPr>
+          <p:nvPr>
+            <p:ph idx="1"/>
+          </p:nvPr>
+        </p:nvSpPr>
+        <p:spPr/>
+        <p:txBody>
+          <a:bodyPr/>
+          <a:lstStyle/>
+          <a:p>
+            <a:pPr marL="0" indent="0">
+              <a:buNone/>
+            </a:pPr>
+            <a:r>
+              <a:rPr lang="es-CR" dirty="0"/>
+              <a:t>Capa </a:t>
+            </a:r>
+            <a:r>
+              <a:rPr lang="es-CR" dirty="0" err="1"/>
+              <a:t>Fisica</a:t>
+            </a:r>
+            <a:r>
+              <a:rPr lang="es-CR" dirty="0"/>
+              <a:t>:</a:t>
+            </a:r>
+          </a:p>
+          <a:p>
+            <a:pPr>
+              <a:buFont typeface="Arial" panose="020B0604020202020204" pitchFamily="34" charset="0"/>
+              <a:buChar char="•"/>
+            </a:pPr>
+            <a:r>
+              <a:rPr lang="es-CR" dirty="0"/>
+              <a:t> </a:t>
+            </a:r>
+            <a:r>
+              <a:rPr lang="es-CR" dirty="0" err="1"/>
+              <a:t>Speading</a:t>
+            </a:r>
+            <a:r>
+              <a:rPr lang="es-CR" dirty="0"/>
+              <a:t> Factor</a:t>
+            </a:r>
+          </a:p>
+          <a:p>
+            <a:pPr>
+              <a:buFont typeface="Arial" panose="020B0604020202020204" pitchFamily="34" charset="0"/>
+              <a:buChar char="•"/>
+            </a:pPr>
+            <a:r>
+              <a:rPr lang="es-CR" dirty="0"/>
+              <a:t> </a:t>
+            </a:r>
+            <a:r>
+              <a:rPr lang="es-CR" dirty="0" err="1"/>
+              <a:t>Coding</a:t>
+            </a:r>
+            <a:r>
+              <a:rPr lang="es-CR" dirty="0"/>
+              <a:t> </a:t>
+            </a:r>
+            <a:r>
+              <a:rPr lang="es-CR" dirty="0" err="1"/>
+              <a:t>Rate</a:t>
+            </a:r>
+            <a:endParaRPr lang="es-CR" dirty="0"/>
+          </a:p>
+          <a:p>
+            <a:pPr>
+              <a:buFont typeface="Arial" panose="020B0604020202020204" pitchFamily="34" charset="0"/>
+              <a:buChar char="•"/>
+            </a:pPr>
+            <a:r>
+              <a:rPr lang="es-CR" dirty="0"/>
+              <a:t> </a:t>
+            </a:r>
+            <a:r>
+              <a:rPr lang="es-CR" dirty="0" err="1"/>
+              <a:t>Bandwidth</a:t>
+            </a:r>
+            <a:endParaRPr lang="es-CR" dirty="0"/>
+          </a:p>
+          <a:p>
+            <a:pPr>
+              <a:buFont typeface="Arial" panose="020B0604020202020204" pitchFamily="34" charset="0"/>
+              <a:buChar char="•"/>
+            </a:pPr>
+            <a:r>
+              <a:rPr lang="es-CR" dirty="0" err="1"/>
+              <a:t>Sync</a:t>
+            </a:r>
+            <a:r>
+              <a:rPr lang="es-CR" dirty="0"/>
+              <a:t> Word</a:t>
+            </a:r>
+          </a:p>
+          <a:p>
+            <a:pPr marL="0" indent="0">
+              <a:buNone/>
+            </a:pPr>
+            <a:r>
+              <a:rPr lang="es-CR" dirty="0"/>
+              <a:t>Capa de Enlace:</a:t>
+            </a:r>
+          </a:p>
+          <a:p>
+            <a:pPr>
+              <a:buFont typeface="Arial" panose="020B0604020202020204" pitchFamily="34" charset="0"/>
+              <a:buChar char="•"/>
+            </a:pPr>
+            <a:r>
+              <a:rPr lang="es-CR" dirty="0"/>
+              <a:t> Adaptive Data </a:t>
+            </a:r>
+            <a:r>
+              <a:rPr lang="es-CR" dirty="0" err="1"/>
+              <a:t>Rate</a:t>
+            </a:r>
+            <a:endParaRPr lang="es-CR" dirty="0"/>
+          </a:p>
+        </p:txBody>
+      </p:sp>
+      <p:pic>
+        <p:nvPicPr>
+          <p:cNvPr id="5122" name="Picture 2" descr="▷ Modelo OSI: que es y para que se utiliza">
+            <a:extLst>
+              <a:ext uri="{FF2B5EF4-FFF2-40B4-BE49-F238E27FC236}">
+                <a16:creationId xmlns:a16="http://schemas.microsoft.com/office/drawing/2014/main" id="{FC684E94-1471-CE58-301F-361AC62AD976}"/>
+              </a:ext>
+            </a:extLst>
+          </p:cNvPr>
+          <p:cNvPicPr>
+            <a:picLocks noChangeAspect="1" noChangeArrowheads="1"/>
+          </p:cNvPicPr>
+          <p:nvPr/>
+        </p:nvPicPr>
+        <p:blipFill>
+          <a:blip r:embed="rId2">
+            <a:extLst>
+              <a:ext uri="{28A0092B-C50C-407E-A947-70E740481C1C}">
+                <a14:useLocalDpi xmlns:a14="http://schemas.microsoft.com/office/drawing/2010/main" val="0"/>
+              </a:ext>
+            </a:extLst>
+          </a:blip>
+          <a:srcRect/>
+          <a:stretch>
+            <a:fillRect/>
+          </a:stretch>
+        </p:blipFill>
+        <p:spPr bwMode="auto">
+          <a:xfrm>
+            <a:off x="6397542" y="1459019"/>
+            <a:ext cx="5172075" cy="4410075"/>
+          </a:xfrm>
+          <a:prstGeom prst="rect">
+            <a:avLst/>
+          </a:prstGeom>
+          <a:noFill/>
+          <a:extLst>
+            <a:ext uri="{909E8E84-426E-40DD-AFC4-6F175D3DCCD1}">
+              <a14:hiddenFill xmlns:a14="http://schemas.microsoft.com/office/drawing/2010/main">
+                <a:solidFill>
+                  <a:srgbClr val="FFFFFF"/>
+                </a:solidFill>
+              </a14:hiddenFill>
+            </a:ext>
+          </a:extLst>
+        </p:spPr>
+      </p:pic>
+    </p:spTree>
+    <p:extLst>
+      <p:ext uri="{BB962C8B-B14F-4D97-AF65-F5344CB8AC3E}">
+        <p14:creationId xmlns:p14="http://schemas.microsoft.com/office/powerpoint/2010/main" val="1145524546"/>
+      </p:ext>
+    </p:extLst>
+  </p:cSld>
+  <p:clrMapOvr>
+    <a:masterClrMapping/>
+  </p:clrMapOvr>
+</p:sld>
+</file>
+
+<file path=ppt/slides/slide17.xml><?xml version="1.0" encoding="utf-8"?>
 <p:sld xmlns:a="http://schemas.openxmlformats.org/drawingml/2006/main" xmlns:r="http://schemas.openxmlformats.org/officeDocument/2006/relationships" xmlns:p="http://schemas.openxmlformats.org/presentationml/2006/main">
   <p:cSld>
     <p:bg>
@@ -31500,7 +32613,7 @@
 </p:sld>
 </file>
 
-<file path=ppt/slides/slide13.xml><?xml version="1.0" encoding="utf-8"?>
+<file path=ppt/slides/slide18.xml><?xml version="1.0" encoding="utf-8"?>
 <p:sld xmlns:a="http://schemas.openxmlformats.org/drawingml/2006/main" xmlns:r="http://schemas.openxmlformats.org/officeDocument/2006/relationships" xmlns:p="http://schemas.openxmlformats.org/presentationml/2006/main">
   <p:cSld>
     <p:bg>
@@ -32026,7 +33139,7 @@
 </p:sld>
 </file>
 
-<file path=ppt/slides/slide14.xml><?xml version="1.0" encoding="utf-8"?>
+<file path=ppt/slides/slide19.xml><?xml version="1.0" encoding="utf-8"?>
 <p:sld xmlns:a="http://schemas.openxmlformats.org/drawingml/2006/main" xmlns:r="http://schemas.openxmlformats.org/officeDocument/2006/relationships" xmlns:p="http://schemas.openxmlformats.org/presentationml/2006/main">
   <p:cSld>
     <p:bg>
@@ -32266,1253 +33379,6 @@
     <p:extLst>
       <p:ext uri="{BB962C8B-B14F-4D97-AF65-F5344CB8AC3E}">
         <p14:creationId xmlns:p14="http://schemas.microsoft.com/office/powerpoint/2010/main" val="794478693"/>
-      </p:ext>
-    </p:extLst>
-  </p:cSld>
-  <p:clrMapOvr>
-    <a:masterClrMapping/>
-  </p:clrMapOvr>
-</p:sld>
-</file>
-
-<file path=ppt/slides/slide15.xml><?xml version="1.0" encoding="utf-8"?>
-<p:sld xmlns:a="http://schemas.openxmlformats.org/drawingml/2006/main" xmlns:r="http://schemas.openxmlformats.org/officeDocument/2006/relationships" xmlns:p="http://schemas.openxmlformats.org/presentationml/2006/main">
-  <p:cSld>
-    <p:bg>
-      <p:bgPr>
-        <a:solidFill>
-          <a:schemeClr val="bg1"/>
-        </a:solidFill>
-        <a:effectLst/>
-      </p:bgPr>
-    </p:bg>
-    <p:spTree>
-      <p:nvGrpSpPr>
-        <p:cNvPr id="1" name=""/>
-        <p:cNvGrpSpPr/>
-        <p:nvPr/>
-      </p:nvGrpSpPr>
-      <p:grpSpPr>
-        <a:xfrm>
-          <a:off x="0" y="0"/>
-          <a:ext cx="0" cy="0"/>
-          <a:chOff x="0" y="0"/>
-          <a:chExt cx="0" cy="0"/>
-        </a:xfrm>
-      </p:grpSpPr>
-      <p:sp useBgFill="1">
-        <p:nvSpPr>
-          <p:cNvPr id="8" name="Rectangle 7">
-            <a:extLst>
-              <a:ext uri="{FF2B5EF4-FFF2-40B4-BE49-F238E27FC236}">
-                <a16:creationId xmlns:a16="http://schemas.microsoft.com/office/drawing/2014/main" id="{3741B58E-3B65-4A01-A276-975AB2CF8A08}"/>
-              </a:ext>
-              <a:ext uri="{C183D7F6-B498-43B3-948B-1728B52AA6E4}">
-                <adec:decorative xmlns:adec="http://schemas.microsoft.com/office/drawing/2017/decorative" val="1"/>
-              </a:ext>
-            </a:extLst>
-          </p:cNvPr>
-          <p:cNvSpPr>
-            <a:spLocks noGrp="1" noRot="1" noChangeAspect="1" noMove="1" noResize="1" noEditPoints="1" noAdjustHandles="1" noChangeArrowheads="1" noChangeShapeType="1" noTextEdit="1"/>
-          </p:cNvSpPr>
-          <p:nvPr>
-            <p:extLst>
-              <p:ext uri="{386F3935-93C4-4BCD-93E2-E3B085C9AB24}">
-                <p16:designElem xmlns:p16="http://schemas.microsoft.com/office/powerpoint/2015/main" val="1"/>
-              </p:ext>
-            </p:extLst>
-          </p:nvPr>
-        </p:nvSpPr>
-        <p:spPr>
-          <a:xfrm>
-            <a:off x="0" y="0"/>
-            <a:ext cx="12186315" cy="6858000"/>
-          </a:xfrm>
-          <a:prstGeom prst="rect">
-            <a:avLst/>
-          </a:prstGeom>
-          <a:ln>
-            <a:noFill/>
-          </a:ln>
-        </p:spPr>
-        <p:style>
-          <a:lnRef idx="2">
-            <a:schemeClr val="accent6">
-              <a:shade val="50000"/>
-            </a:schemeClr>
-          </a:lnRef>
-          <a:fillRef idx="1001">
-            <a:schemeClr val="lt1"/>
-          </a:fillRef>
-          <a:effectRef idx="0">
-            <a:schemeClr val="accent6"/>
-          </a:effectRef>
-          <a:fontRef idx="minor">
-            <a:schemeClr val="lt1"/>
-          </a:fontRef>
-        </p:style>
-        <p:txBody>
-          <a:bodyPr rtlCol="0" anchor="ctr"/>
-          <a:lstStyle/>
-          <a:p>
-            <a:pPr algn="ctr"/>
-            <a:endParaRPr lang="en-US"/>
-          </a:p>
-        </p:txBody>
-      </p:sp>
-      <p:sp>
-        <p:nvSpPr>
-          <p:cNvPr id="10" name="Rectangle 9">
-            <a:extLst>
-              <a:ext uri="{FF2B5EF4-FFF2-40B4-BE49-F238E27FC236}">
-                <a16:creationId xmlns:a16="http://schemas.microsoft.com/office/drawing/2014/main" id="{7AAC67C3-831B-4AB1-A259-DFB839CAFAFC}"/>
-              </a:ext>
-              <a:ext uri="{C183D7F6-B498-43B3-948B-1728B52AA6E4}">
-                <adec:decorative xmlns:adec="http://schemas.microsoft.com/office/drawing/2017/decorative" val="1"/>
-              </a:ext>
-            </a:extLst>
-          </p:cNvPr>
-          <p:cNvSpPr>
-            <a:spLocks noGrp="1" noRot="1" noChangeAspect="1" noMove="1" noResize="1" noEditPoints="1" noAdjustHandles="1" noChangeArrowheads="1" noChangeShapeType="1" noTextEdit="1"/>
-          </p:cNvSpPr>
-          <p:nvPr>
-            <p:extLst>
-              <p:ext uri="{386F3935-93C4-4BCD-93E2-E3B085C9AB24}">
-                <p16:designElem xmlns:p16="http://schemas.microsoft.com/office/powerpoint/2015/main" val="1"/>
-              </p:ext>
-            </p:extLst>
-          </p:nvPr>
-        </p:nvSpPr>
-        <p:spPr>
-          <a:xfrm>
-            <a:off x="16" y="0"/>
-            <a:ext cx="4050791" cy="6858000"/>
-          </a:xfrm>
-          <a:prstGeom prst="rect">
-            <a:avLst/>
-          </a:prstGeom>
-          <a:solidFill>
-            <a:schemeClr val="accent2"/>
-          </a:solidFill>
-          <a:ln>
-            <a:noFill/>
-          </a:ln>
-        </p:spPr>
-        <p:style>
-          <a:lnRef idx="2">
-            <a:schemeClr val="accent1">
-              <a:shade val="50000"/>
-            </a:schemeClr>
-          </a:lnRef>
-          <a:fillRef idx="1">
-            <a:schemeClr val="accent1"/>
-          </a:fillRef>
-          <a:effectRef idx="0">
-            <a:schemeClr val="accent1"/>
-          </a:effectRef>
-          <a:fontRef idx="minor">
-            <a:schemeClr val="lt1"/>
-          </a:fontRef>
-        </p:style>
-        <p:txBody>
-          <a:bodyPr/>
-          <a:lstStyle/>
-          <a:p>
-            <a:endParaRPr lang="en-US"/>
-          </a:p>
-        </p:txBody>
-      </p:sp>
-      <p:sp>
-        <p:nvSpPr>
-          <p:cNvPr id="2" name="Title 1">
-            <a:extLst>
-              <a:ext uri="{FF2B5EF4-FFF2-40B4-BE49-F238E27FC236}">
-                <a16:creationId xmlns:a16="http://schemas.microsoft.com/office/drawing/2014/main" id="{65CD047D-90F9-659F-EE93-AAD8C3790A3B}"/>
-              </a:ext>
-            </a:extLst>
-          </p:cNvPr>
-          <p:cNvSpPr>
-            <a:spLocks noGrp="1"/>
-          </p:cNvSpPr>
-          <p:nvPr>
-            <p:ph type="title"/>
-          </p:nvPr>
-        </p:nvSpPr>
-        <p:spPr>
-          <a:xfrm>
-            <a:off x="492370" y="605896"/>
-            <a:ext cx="3084844" cy="5646208"/>
-          </a:xfrm>
-        </p:spPr>
-        <p:txBody>
-          <a:bodyPr anchor="ctr">
-            <a:normAutofit/>
-          </a:bodyPr>
-          <a:lstStyle/>
-          <a:p>
-            <a:r>
-              <a:rPr lang="en-US" sz="3600">
-                <a:solidFill>
-                  <a:srgbClr val="FFFFFF"/>
-                </a:solidFill>
-              </a:rPr>
-              <a:t>Qué define el PNAF</a:t>
-            </a:r>
-          </a:p>
-        </p:txBody>
-      </p:sp>
-      <p:sp>
-        <p:nvSpPr>
-          <p:cNvPr id="12" name="Rectangle 11">
-            <a:extLst>
-              <a:ext uri="{FF2B5EF4-FFF2-40B4-BE49-F238E27FC236}">
-                <a16:creationId xmlns:a16="http://schemas.microsoft.com/office/drawing/2014/main" id="{054B3F04-9EAC-45C0-B3CE-0387EEA10A0C}"/>
-              </a:ext>
-              <a:ext uri="{C183D7F6-B498-43B3-948B-1728B52AA6E4}">
-                <adec:decorative xmlns:adec="http://schemas.microsoft.com/office/drawing/2017/decorative" val="1"/>
-              </a:ext>
-            </a:extLst>
-          </p:cNvPr>
-          <p:cNvSpPr>
-            <a:spLocks noGrp="1" noRot="1" noChangeAspect="1" noMove="1" noResize="1" noEditPoints="1" noAdjustHandles="1" noChangeArrowheads="1" noChangeShapeType="1" noTextEdit="1"/>
-          </p:cNvSpPr>
-          <p:nvPr>
-            <p:extLst>
-              <p:ext uri="{386F3935-93C4-4BCD-93E2-E3B085C9AB24}">
-                <p16:designElem xmlns:p16="http://schemas.microsoft.com/office/powerpoint/2015/main" val="1"/>
-              </p:ext>
-            </p:extLst>
-          </p:nvPr>
-        </p:nvSpPr>
-        <p:spPr>
-          <a:xfrm>
-            <a:off x="4040071" y="0"/>
-            <a:ext cx="64008" cy="6858000"/>
-          </a:xfrm>
-          <a:prstGeom prst="rect">
-            <a:avLst/>
-          </a:prstGeom>
-          <a:solidFill>
-            <a:schemeClr val="accent1"/>
-          </a:solidFill>
-          <a:ln>
-            <a:noFill/>
-          </a:ln>
-        </p:spPr>
-        <p:style>
-          <a:lnRef idx="2">
-            <a:schemeClr val="accent1">
-              <a:shade val="50000"/>
-            </a:schemeClr>
-          </a:lnRef>
-          <a:fillRef idx="1">
-            <a:schemeClr val="accent1"/>
-          </a:fillRef>
-          <a:effectRef idx="0">
-            <a:schemeClr val="accent1"/>
-          </a:effectRef>
-          <a:fontRef idx="minor">
-            <a:schemeClr val="lt1"/>
-          </a:fontRef>
-        </p:style>
-        <p:txBody>
-          <a:bodyPr/>
-          <a:lstStyle/>
-          <a:p>
-            <a:endParaRPr lang="en-US"/>
-          </a:p>
-        </p:txBody>
-      </p:sp>
-      <p:sp>
-        <p:nvSpPr>
-          <p:cNvPr id="3" name="Content Placeholder 2">
-            <a:extLst>
-              <a:ext uri="{FF2B5EF4-FFF2-40B4-BE49-F238E27FC236}">
-                <a16:creationId xmlns:a16="http://schemas.microsoft.com/office/drawing/2014/main" id="{1E26DE09-DAD3-B592-9195-BFB565EDC21C}"/>
-              </a:ext>
-            </a:extLst>
-          </p:cNvPr>
-          <p:cNvSpPr>
-            <a:spLocks noGrp="1"/>
-          </p:cNvSpPr>
-          <p:nvPr>
-            <p:ph idx="1"/>
-          </p:nvPr>
-        </p:nvSpPr>
-        <p:spPr>
-          <a:xfrm>
-            <a:off x="4742016" y="605896"/>
-            <a:ext cx="6413663" cy="5646208"/>
-          </a:xfrm>
-        </p:spPr>
-        <p:txBody>
-          <a:bodyPr anchor="ctr">
-            <a:normAutofit/>
-          </a:bodyPr>
-          <a:lstStyle/>
-          <a:p>
-            <a:pPr>
-              <a:buFont typeface="Arial" panose="020B0604020202020204" pitchFamily="34" charset="0"/>
-              <a:buChar char="•"/>
-            </a:pPr>
-            <a:r>
-              <a:rPr lang="es-MX" dirty="0"/>
-              <a:t>El PNAF establece:</a:t>
-            </a:r>
-          </a:p>
-          <a:p>
-            <a:pPr lvl="1">
-              <a:buFont typeface="Arial" panose="020B0604020202020204" pitchFamily="34" charset="0"/>
-              <a:buChar char="•"/>
-            </a:pPr>
-            <a:r>
-              <a:rPr lang="es-MX" dirty="0"/>
-              <a:t>Bandas asignadas a cada servicio</a:t>
-            </a:r>
-          </a:p>
-          <a:p>
-            <a:pPr lvl="2">
-              <a:buFont typeface="Arial" panose="020B0604020202020204" pitchFamily="34" charset="0"/>
-              <a:buChar char="•"/>
-            </a:pPr>
-            <a:r>
-              <a:rPr lang="es-MX" dirty="0"/>
-              <a:t>Radiodifusión</a:t>
-            </a:r>
-          </a:p>
-          <a:p>
-            <a:pPr lvl="2">
-              <a:buFont typeface="Arial" panose="020B0604020202020204" pitchFamily="34" charset="0"/>
-              <a:buChar char="•"/>
-            </a:pPr>
-            <a:r>
-              <a:rPr lang="es-MX" dirty="0"/>
-              <a:t>Móvil</a:t>
-            </a:r>
-          </a:p>
-          <a:p>
-            <a:pPr lvl="2">
-              <a:buFont typeface="Arial" panose="020B0604020202020204" pitchFamily="34" charset="0"/>
-              <a:buChar char="•"/>
-            </a:pPr>
-            <a:r>
-              <a:rPr lang="es-MX" dirty="0"/>
-              <a:t>Satelital</a:t>
-            </a:r>
-          </a:p>
-          <a:p>
-            <a:pPr lvl="2">
-              <a:buFont typeface="Arial" panose="020B0604020202020204" pitchFamily="34" charset="0"/>
-              <a:buChar char="•"/>
-            </a:pPr>
-            <a:r>
-              <a:rPr lang="es-MX" dirty="0"/>
-              <a:t>Radioaficionados</a:t>
-            </a:r>
-          </a:p>
-          <a:p>
-            <a:pPr lvl="1">
-              <a:buFont typeface="Arial" panose="020B0604020202020204" pitchFamily="34" charset="0"/>
-              <a:buChar char="•"/>
-            </a:pPr>
-            <a:r>
-              <a:rPr lang="es-MX" dirty="0"/>
-              <a:t>Bandas de uso libre</a:t>
-            </a:r>
-          </a:p>
-          <a:p>
-            <a:pPr lvl="1">
-              <a:buFont typeface="Arial" panose="020B0604020202020204" pitchFamily="34" charset="0"/>
-              <a:buChar char="•"/>
-            </a:pPr>
-            <a:r>
-              <a:rPr lang="es-MX" dirty="0"/>
-              <a:t>Bandas que requieren licencia o concesión</a:t>
-            </a:r>
-          </a:p>
-          <a:p>
-            <a:pPr lvl="1">
-              <a:buFont typeface="Arial" panose="020B0604020202020204" pitchFamily="34" charset="0"/>
-              <a:buChar char="•"/>
-            </a:pPr>
-            <a:r>
-              <a:rPr lang="es-MX" dirty="0"/>
-              <a:t>Límites técnicos:</a:t>
-            </a:r>
-          </a:p>
-          <a:p>
-            <a:pPr lvl="2">
-              <a:buFont typeface="Arial" panose="020B0604020202020204" pitchFamily="34" charset="0"/>
-              <a:buChar char="•"/>
-            </a:pPr>
-            <a:r>
-              <a:rPr lang="es-MX" dirty="0"/>
-              <a:t>Potencia máxima</a:t>
-            </a:r>
-          </a:p>
-          <a:p>
-            <a:pPr lvl="2">
-              <a:buFont typeface="Arial" panose="020B0604020202020204" pitchFamily="34" charset="0"/>
-              <a:buChar char="•"/>
-            </a:pPr>
-            <a:r>
-              <a:rPr lang="es-MX" dirty="0"/>
-              <a:t>Condiciones de operación</a:t>
-            </a:r>
-            <a:endParaRPr lang="en-US" dirty="0"/>
-          </a:p>
-        </p:txBody>
-      </p:sp>
-    </p:spTree>
-    <p:extLst>
-      <p:ext uri="{BB962C8B-B14F-4D97-AF65-F5344CB8AC3E}">
-        <p14:creationId xmlns:p14="http://schemas.microsoft.com/office/powerpoint/2010/main" val="426939672"/>
-      </p:ext>
-    </p:extLst>
-  </p:cSld>
-  <p:clrMapOvr>
-    <a:masterClrMapping/>
-  </p:clrMapOvr>
-</p:sld>
-</file>
-
-<file path=ppt/slides/slide16.xml><?xml version="1.0" encoding="utf-8"?>
-<p:sld xmlns:a="http://schemas.openxmlformats.org/drawingml/2006/main" xmlns:r="http://schemas.openxmlformats.org/officeDocument/2006/relationships" xmlns:p="http://schemas.openxmlformats.org/presentationml/2006/main">
-  <p:cSld>
-    <p:spTree>
-      <p:nvGrpSpPr>
-        <p:cNvPr id="1" name=""/>
-        <p:cNvGrpSpPr/>
-        <p:nvPr/>
-      </p:nvGrpSpPr>
-      <p:grpSpPr>
-        <a:xfrm>
-          <a:off x="0" y="0"/>
-          <a:ext cx="0" cy="0"/>
-          <a:chOff x="0" y="0"/>
-          <a:chExt cx="0" cy="0"/>
-        </a:xfrm>
-      </p:grpSpPr>
-      <p:sp>
-        <p:nvSpPr>
-          <p:cNvPr id="2" name="Title 1">
-            <a:extLst>
-              <a:ext uri="{FF2B5EF4-FFF2-40B4-BE49-F238E27FC236}">
-                <a16:creationId xmlns:a16="http://schemas.microsoft.com/office/drawing/2014/main" id="{D73A1A86-0AB4-0EED-5712-7C4F4FE25045}"/>
-              </a:ext>
-            </a:extLst>
-          </p:cNvPr>
-          <p:cNvSpPr>
-            <a:spLocks noGrp="1"/>
-          </p:cNvSpPr>
-          <p:nvPr>
-            <p:ph type="title"/>
-          </p:nvPr>
-        </p:nvSpPr>
-        <p:spPr/>
-        <p:txBody>
-          <a:bodyPr/>
-          <a:lstStyle/>
-          <a:p>
-            <a:r>
-              <a:rPr lang="en-US" dirty="0" err="1"/>
-              <a:t>Importancia</a:t>
-            </a:r>
-            <a:r>
-              <a:rPr lang="en-US" dirty="0"/>
-              <a:t> del PNAF para LoRa/APRS</a:t>
-            </a:r>
-          </a:p>
-        </p:txBody>
-      </p:sp>
-      <p:graphicFrame>
-        <p:nvGraphicFramePr>
-          <p:cNvPr id="5" name="Content Placeholder 2">
-            <a:extLst>
-              <a:ext uri="{FF2B5EF4-FFF2-40B4-BE49-F238E27FC236}">
-                <a16:creationId xmlns:a16="http://schemas.microsoft.com/office/drawing/2014/main" id="{7B9E6B43-32D4-9B6E-23CD-8074EB349B7C}"/>
-              </a:ext>
-            </a:extLst>
-          </p:cNvPr>
-          <p:cNvGraphicFramePr>
-            <a:graphicFrameLocks noGrp="1"/>
-          </p:cNvGraphicFramePr>
-          <p:nvPr>
-            <p:ph idx="1"/>
-          </p:nvPr>
-        </p:nvGraphicFramePr>
-        <p:xfrm>
-          <a:off x="1097280" y="1845734"/>
-          <a:ext cx="10058400" cy="4023360"/>
-        </p:xfrm>
-        <a:graphic>
-          <a:graphicData uri="http://schemas.openxmlformats.org/drawingml/2006/diagram">
-            <dgm:relIds xmlns:dgm="http://schemas.openxmlformats.org/drawingml/2006/diagram" xmlns:r="http://schemas.openxmlformats.org/officeDocument/2006/relationships" r:dm="rId2" r:lo="rId3" r:qs="rId4" r:cs="rId5"/>
-          </a:graphicData>
-        </a:graphic>
-      </p:graphicFrame>
-    </p:spTree>
-    <p:extLst>
-      <p:ext uri="{BB962C8B-B14F-4D97-AF65-F5344CB8AC3E}">
-        <p14:creationId xmlns:p14="http://schemas.microsoft.com/office/powerpoint/2010/main" val="4256257207"/>
-      </p:ext>
-    </p:extLst>
-  </p:cSld>
-  <p:clrMapOvr>
-    <a:masterClrMapping/>
-  </p:clrMapOvr>
-</p:sld>
-</file>
-
-<file path=ppt/slides/slide17.xml><?xml version="1.0" encoding="utf-8"?>
-<p:sld xmlns:a="http://schemas.openxmlformats.org/drawingml/2006/main" xmlns:r="http://schemas.openxmlformats.org/officeDocument/2006/relationships" xmlns:p="http://schemas.openxmlformats.org/presentationml/2006/main">
-  <p:cSld>
-    <p:bg>
-      <p:bgPr>
-        <a:solidFill>
-          <a:schemeClr val="bg1"/>
-        </a:solidFill>
-        <a:effectLst/>
-      </p:bgPr>
-    </p:bg>
-    <p:spTree>
-      <p:nvGrpSpPr>
-        <p:cNvPr id="1" name=""/>
-        <p:cNvGrpSpPr/>
-        <p:nvPr/>
-      </p:nvGrpSpPr>
-      <p:grpSpPr>
-        <a:xfrm>
-          <a:off x="0" y="0"/>
-          <a:ext cx="0" cy="0"/>
-          <a:chOff x="0" y="0"/>
-          <a:chExt cx="0" cy="0"/>
-        </a:xfrm>
-      </p:grpSpPr>
-      <p:sp useBgFill="1">
-        <p:nvSpPr>
-          <p:cNvPr id="9" name="Rectangle 8">
-            <a:extLst>
-              <a:ext uri="{FF2B5EF4-FFF2-40B4-BE49-F238E27FC236}">
-                <a16:creationId xmlns:a16="http://schemas.microsoft.com/office/drawing/2014/main" id="{FB5993E2-C02B-4335-ABA5-D8EC465551E3}"/>
-              </a:ext>
-              <a:ext uri="{C183D7F6-B498-43B3-948B-1728B52AA6E4}">
-                <adec:decorative xmlns:adec="http://schemas.microsoft.com/office/drawing/2017/decorative" val="1"/>
-              </a:ext>
-            </a:extLst>
-          </p:cNvPr>
-          <p:cNvSpPr>
-            <a:spLocks noGrp="1" noRot="1" noChangeAspect="1" noMove="1" noResize="1" noEditPoints="1" noAdjustHandles="1" noChangeArrowheads="1" noChangeShapeType="1" noTextEdit="1"/>
-          </p:cNvSpPr>
-          <p:nvPr>
-            <p:extLst>
-              <p:ext uri="{386F3935-93C4-4BCD-93E2-E3B085C9AB24}">
-                <p16:designElem xmlns:p16="http://schemas.microsoft.com/office/powerpoint/2015/main" val="1"/>
-              </p:ext>
-            </p:extLst>
-          </p:nvPr>
-        </p:nvSpPr>
-        <p:spPr>
-          <a:xfrm>
-            <a:off x="0" y="0"/>
-            <a:ext cx="12186315" cy="6858000"/>
-          </a:xfrm>
-          <a:prstGeom prst="rect">
-            <a:avLst/>
-          </a:prstGeom>
-          <a:ln>
-            <a:noFill/>
-          </a:ln>
-        </p:spPr>
-        <p:style>
-          <a:lnRef idx="2">
-            <a:schemeClr val="accent6">
-              <a:shade val="50000"/>
-            </a:schemeClr>
-          </a:lnRef>
-          <a:fillRef idx="1001">
-            <a:schemeClr val="lt1"/>
-          </a:fillRef>
-          <a:effectRef idx="0">
-            <a:schemeClr val="accent6"/>
-          </a:effectRef>
-          <a:fontRef idx="minor">
-            <a:schemeClr val="lt1"/>
-          </a:fontRef>
-        </p:style>
-        <p:txBody>
-          <a:bodyPr rtlCol="0" anchor="ctr"/>
-          <a:lstStyle/>
-          <a:p>
-            <a:pPr algn="ctr"/>
-            <a:endParaRPr lang="en-US"/>
-          </a:p>
-        </p:txBody>
-      </p:sp>
-      <p:sp>
-        <p:nvSpPr>
-          <p:cNvPr id="11" name="Rectangle 10">
-            <a:extLst>
-              <a:ext uri="{FF2B5EF4-FFF2-40B4-BE49-F238E27FC236}">
-                <a16:creationId xmlns:a16="http://schemas.microsoft.com/office/drawing/2014/main" id="{C0B801A2-5622-4BE8-9AD2-C337A2CD0022}"/>
-              </a:ext>
-              <a:ext uri="{C183D7F6-B498-43B3-948B-1728B52AA6E4}">
-                <adec:decorative xmlns:adec="http://schemas.microsoft.com/office/drawing/2017/decorative" val="1"/>
-              </a:ext>
-            </a:extLst>
-          </p:cNvPr>
-          <p:cNvSpPr>
-            <a:spLocks noGrp="1" noRot="1" noChangeAspect="1" noMove="1" noResize="1" noEditPoints="1" noAdjustHandles="1" noChangeArrowheads="1" noChangeShapeType="1" noTextEdit="1"/>
-          </p:cNvSpPr>
-          <p:nvPr>
-            <p:extLst>
-              <p:ext uri="{386F3935-93C4-4BCD-93E2-E3B085C9AB24}">
-                <p16:designElem xmlns:p16="http://schemas.microsoft.com/office/powerpoint/2015/main" val="1"/>
-              </p:ext>
-            </p:extLst>
-          </p:nvPr>
-        </p:nvSpPr>
-        <p:spPr>
-          <a:xfrm>
-            <a:off x="16" y="0"/>
-            <a:ext cx="4050791" cy="6858000"/>
-          </a:xfrm>
-          <a:prstGeom prst="rect">
-            <a:avLst/>
-          </a:prstGeom>
-          <a:solidFill>
-            <a:schemeClr val="accent2"/>
-          </a:solidFill>
-          <a:ln>
-            <a:noFill/>
-          </a:ln>
-        </p:spPr>
-        <p:style>
-          <a:lnRef idx="2">
-            <a:schemeClr val="accent1">
-              <a:shade val="50000"/>
-            </a:schemeClr>
-          </a:lnRef>
-          <a:fillRef idx="1">
-            <a:schemeClr val="accent1"/>
-          </a:fillRef>
-          <a:effectRef idx="0">
-            <a:schemeClr val="accent1"/>
-          </a:effectRef>
-          <a:fontRef idx="minor">
-            <a:schemeClr val="lt1"/>
-          </a:fontRef>
-        </p:style>
-        <p:txBody>
-          <a:bodyPr/>
-          <a:lstStyle/>
-          <a:p>
-            <a:endParaRPr lang="en-US"/>
-          </a:p>
-        </p:txBody>
-      </p:sp>
-      <p:sp>
-        <p:nvSpPr>
-          <p:cNvPr id="2" name="Title 1">
-            <a:extLst>
-              <a:ext uri="{FF2B5EF4-FFF2-40B4-BE49-F238E27FC236}">
-                <a16:creationId xmlns:a16="http://schemas.microsoft.com/office/drawing/2014/main" id="{183149AA-E1C8-0B50-DA75-023F6A89216C}"/>
-              </a:ext>
-            </a:extLst>
-          </p:cNvPr>
-          <p:cNvSpPr>
-            <a:spLocks noGrp="1"/>
-          </p:cNvSpPr>
-          <p:nvPr>
-            <p:ph type="title"/>
-          </p:nvPr>
-        </p:nvSpPr>
-        <p:spPr>
-          <a:xfrm>
-            <a:off x="492370" y="516835"/>
-            <a:ext cx="3084844" cy="5772840"/>
-          </a:xfrm>
-        </p:spPr>
-        <p:txBody>
-          <a:bodyPr anchor="ctr">
-            <a:normAutofit/>
-          </a:bodyPr>
-          <a:lstStyle/>
-          <a:p>
-            <a:r>
-              <a:rPr lang="en-US" sz="3600">
-                <a:solidFill>
-                  <a:srgbClr val="FFFFFF"/>
-                </a:solidFill>
-              </a:rPr>
-              <a:t>Permisos requeridos</a:t>
-            </a:r>
-          </a:p>
-        </p:txBody>
-      </p:sp>
-      <p:sp>
-        <p:nvSpPr>
-          <p:cNvPr id="13" name="Rectangle 12">
-            <a:extLst>
-              <a:ext uri="{FF2B5EF4-FFF2-40B4-BE49-F238E27FC236}">
-                <a16:creationId xmlns:a16="http://schemas.microsoft.com/office/drawing/2014/main" id="{B7AF614F-5BC3-4086-99F5-B87C5847A071}"/>
-              </a:ext>
-              <a:ext uri="{C183D7F6-B498-43B3-948B-1728B52AA6E4}">
-                <adec:decorative xmlns:adec="http://schemas.microsoft.com/office/drawing/2017/decorative" val="1"/>
-              </a:ext>
-            </a:extLst>
-          </p:cNvPr>
-          <p:cNvSpPr>
-            <a:spLocks noGrp="1" noRot="1" noChangeAspect="1" noMove="1" noResize="1" noEditPoints="1" noAdjustHandles="1" noChangeArrowheads="1" noChangeShapeType="1" noTextEdit="1"/>
-          </p:cNvSpPr>
-          <p:nvPr>
-            <p:extLst>
-              <p:ext uri="{386F3935-93C4-4BCD-93E2-E3B085C9AB24}">
-                <p16:designElem xmlns:p16="http://schemas.microsoft.com/office/powerpoint/2015/main" val="1"/>
-              </p:ext>
-            </p:extLst>
-          </p:nvPr>
-        </p:nvSpPr>
-        <p:spPr>
-          <a:xfrm>
-            <a:off x="4040071" y="0"/>
-            <a:ext cx="64008" cy="6858000"/>
-          </a:xfrm>
-          <a:prstGeom prst="rect">
-            <a:avLst/>
-          </a:prstGeom>
-          <a:solidFill>
-            <a:schemeClr val="accent1"/>
-          </a:solidFill>
-          <a:ln>
-            <a:noFill/>
-          </a:ln>
-        </p:spPr>
-        <p:style>
-          <a:lnRef idx="2">
-            <a:schemeClr val="accent1">
-              <a:shade val="50000"/>
-            </a:schemeClr>
-          </a:lnRef>
-          <a:fillRef idx="1">
-            <a:schemeClr val="accent1"/>
-          </a:fillRef>
-          <a:effectRef idx="0">
-            <a:schemeClr val="accent1"/>
-          </a:effectRef>
-          <a:fontRef idx="minor">
-            <a:schemeClr val="lt1"/>
-          </a:fontRef>
-        </p:style>
-        <p:txBody>
-          <a:bodyPr/>
-          <a:lstStyle/>
-          <a:p>
-            <a:endParaRPr lang="en-US"/>
-          </a:p>
-        </p:txBody>
-      </p:sp>
-      <p:graphicFrame>
-        <p:nvGraphicFramePr>
-          <p:cNvPr id="5" name="Content Placeholder 2">
-            <a:extLst>
-              <a:ext uri="{FF2B5EF4-FFF2-40B4-BE49-F238E27FC236}">
-                <a16:creationId xmlns:a16="http://schemas.microsoft.com/office/drawing/2014/main" id="{015FA51F-EF08-0D77-A722-A57B93D8027E}"/>
-              </a:ext>
-            </a:extLst>
-          </p:cNvPr>
-          <p:cNvGraphicFramePr>
-            <a:graphicFrameLocks noGrp="1"/>
-          </p:cNvGraphicFramePr>
-          <p:nvPr>
-            <p:ph idx="1"/>
-            <p:extLst>
-              <p:ext uri="{D42A27DB-BD31-4B8C-83A1-F6EECF244321}">
-                <p14:modId xmlns:p14="http://schemas.microsoft.com/office/powerpoint/2010/main" val="346213692"/>
-              </p:ext>
-            </p:extLst>
-          </p:nvPr>
-        </p:nvGraphicFramePr>
-        <p:xfrm>
-          <a:off x="4741863" y="639763"/>
-          <a:ext cx="6797675" cy="5649912"/>
-        </p:xfrm>
-        <a:graphic>
-          <a:graphicData uri="http://schemas.openxmlformats.org/drawingml/2006/diagram">
-            <dgm:relIds xmlns:dgm="http://schemas.openxmlformats.org/drawingml/2006/diagram" xmlns:r="http://schemas.openxmlformats.org/officeDocument/2006/relationships" r:dm="rId2" r:lo="rId3" r:qs="rId4" r:cs="rId5"/>
-          </a:graphicData>
-        </a:graphic>
-      </p:graphicFrame>
-    </p:spTree>
-    <p:extLst>
-      <p:ext uri="{BB962C8B-B14F-4D97-AF65-F5344CB8AC3E}">
-        <p14:creationId xmlns:p14="http://schemas.microsoft.com/office/powerpoint/2010/main" val="375664245"/>
-      </p:ext>
-    </p:extLst>
-  </p:cSld>
-  <p:clrMapOvr>
-    <a:masterClrMapping/>
-  </p:clrMapOvr>
-</p:sld>
-</file>
-
-<file path=ppt/slides/slide18.xml><?xml version="1.0" encoding="utf-8"?>
-<p:sld xmlns:a="http://schemas.openxmlformats.org/drawingml/2006/main" xmlns:r="http://schemas.openxmlformats.org/officeDocument/2006/relationships" xmlns:p="http://schemas.openxmlformats.org/presentationml/2006/main">
-  <p:cSld>
-    <p:bg>
-      <p:bgPr>
-        <a:solidFill>
-          <a:schemeClr val="bg1"/>
-        </a:solidFill>
-        <a:effectLst/>
-      </p:bgPr>
-    </p:bg>
-    <p:spTree>
-      <p:nvGrpSpPr>
-        <p:cNvPr id="1" name=""/>
-        <p:cNvGrpSpPr/>
-        <p:nvPr/>
-      </p:nvGrpSpPr>
-      <p:grpSpPr>
-        <a:xfrm>
-          <a:off x="0" y="0"/>
-          <a:ext cx="0" cy="0"/>
-          <a:chOff x="0" y="0"/>
-          <a:chExt cx="0" cy="0"/>
-        </a:xfrm>
-      </p:grpSpPr>
-      <p:sp useBgFill="1">
-        <p:nvSpPr>
-          <p:cNvPr id="15" name="Rectangle 14">
-            <a:extLst>
-              <a:ext uri="{FF2B5EF4-FFF2-40B4-BE49-F238E27FC236}">
-                <a16:creationId xmlns:a16="http://schemas.microsoft.com/office/drawing/2014/main" id="{FB5993E2-C02B-4335-ABA5-D8EC465551E3}"/>
-              </a:ext>
-              <a:ext uri="{C183D7F6-B498-43B3-948B-1728B52AA6E4}">
-                <adec:decorative xmlns:adec="http://schemas.microsoft.com/office/drawing/2017/decorative" val="1"/>
-              </a:ext>
-            </a:extLst>
-          </p:cNvPr>
-          <p:cNvSpPr>
-            <a:spLocks noGrp="1" noRot="1" noChangeAspect="1" noMove="1" noResize="1" noEditPoints="1" noAdjustHandles="1" noChangeArrowheads="1" noChangeShapeType="1" noTextEdit="1"/>
-          </p:cNvSpPr>
-          <p:nvPr>
-            <p:extLst>
-              <p:ext uri="{386F3935-93C4-4BCD-93E2-E3B085C9AB24}">
-                <p16:designElem xmlns:p16="http://schemas.microsoft.com/office/powerpoint/2015/main" val="1"/>
-              </p:ext>
-            </p:extLst>
-          </p:nvPr>
-        </p:nvSpPr>
-        <p:spPr>
-          <a:xfrm>
-            <a:off x="0" y="0"/>
-            <a:ext cx="12186315" cy="6858000"/>
-          </a:xfrm>
-          <a:prstGeom prst="rect">
-            <a:avLst/>
-          </a:prstGeom>
-          <a:ln>
-            <a:noFill/>
-          </a:ln>
-        </p:spPr>
-        <p:style>
-          <a:lnRef idx="2">
-            <a:schemeClr val="accent6">
-              <a:shade val="50000"/>
-            </a:schemeClr>
-          </a:lnRef>
-          <a:fillRef idx="1001">
-            <a:schemeClr val="lt1"/>
-          </a:fillRef>
-          <a:effectRef idx="0">
-            <a:schemeClr val="accent6"/>
-          </a:effectRef>
-          <a:fontRef idx="minor">
-            <a:schemeClr val="lt1"/>
-          </a:fontRef>
-        </p:style>
-        <p:txBody>
-          <a:bodyPr rtlCol="0" anchor="ctr"/>
-          <a:lstStyle/>
-          <a:p>
-            <a:pPr algn="ctr"/>
-            <a:endParaRPr lang="en-US"/>
-          </a:p>
-        </p:txBody>
-      </p:sp>
-      <p:sp>
-        <p:nvSpPr>
-          <p:cNvPr id="16" name="Rectangle 15">
-            <a:extLst>
-              <a:ext uri="{FF2B5EF4-FFF2-40B4-BE49-F238E27FC236}">
-                <a16:creationId xmlns:a16="http://schemas.microsoft.com/office/drawing/2014/main" id="{C0B801A2-5622-4BE8-9AD2-C337A2CD0022}"/>
-              </a:ext>
-              <a:ext uri="{C183D7F6-B498-43B3-948B-1728B52AA6E4}">
-                <adec:decorative xmlns:adec="http://schemas.microsoft.com/office/drawing/2017/decorative" val="1"/>
-              </a:ext>
-            </a:extLst>
-          </p:cNvPr>
-          <p:cNvSpPr>
-            <a:spLocks noGrp="1" noRot="1" noChangeAspect="1" noMove="1" noResize="1" noEditPoints="1" noAdjustHandles="1" noChangeArrowheads="1" noChangeShapeType="1" noTextEdit="1"/>
-          </p:cNvSpPr>
-          <p:nvPr>
-            <p:extLst>
-              <p:ext uri="{386F3935-93C4-4BCD-93E2-E3B085C9AB24}">
-                <p16:designElem xmlns:p16="http://schemas.microsoft.com/office/powerpoint/2015/main" val="1"/>
-              </p:ext>
-            </p:extLst>
-          </p:nvPr>
-        </p:nvSpPr>
-        <p:spPr>
-          <a:xfrm>
-            <a:off x="16" y="0"/>
-            <a:ext cx="4050791" cy="6858000"/>
-          </a:xfrm>
-          <a:prstGeom prst="rect">
-            <a:avLst/>
-          </a:prstGeom>
-          <a:solidFill>
-            <a:schemeClr val="accent2"/>
-          </a:solidFill>
-          <a:ln>
-            <a:noFill/>
-          </a:ln>
-        </p:spPr>
-        <p:style>
-          <a:lnRef idx="2">
-            <a:schemeClr val="accent1">
-              <a:shade val="50000"/>
-            </a:schemeClr>
-          </a:lnRef>
-          <a:fillRef idx="1">
-            <a:schemeClr val="accent1"/>
-          </a:fillRef>
-          <a:effectRef idx="0">
-            <a:schemeClr val="accent1"/>
-          </a:effectRef>
-          <a:fontRef idx="minor">
-            <a:schemeClr val="lt1"/>
-          </a:fontRef>
-        </p:style>
-        <p:txBody>
-          <a:bodyPr/>
-          <a:lstStyle/>
-          <a:p>
-            <a:endParaRPr lang="en-US"/>
-          </a:p>
-        </p:txBody>
-      </p:sp>
-      <p:sp>
-        <p:nvSpPr>
-          <p:cNvPr id="2" name="Title 1">
-            <a:extLst>
-              <a:ext uri="{FF2B5EF4-FFF2-40B4-BE49-F238E27FC236}">
-                <a16:creationId xmlns:a16="http://schemas.microsoft.com/office/drawing/2014/main" id="{98176695-7082-49F2-AE8D-2730E307A604}"/>
-              </a:ext>
-            </a:extLst>
-          </p:cNvPr>
-          <p:cNvSpPr>
-            <a:spLocks noGrp="1"/>
-          </p:cNvSpPr>
-          <p:nvPr>
-            <p:ph type="title"/>
-          </p:nvPr>
-        </p:nvSpPr>
-        <p:spPr>
-          <a:xfrm>
-            <a:off x="492370" y="516835"/>
-            <a:ext cx="3084844" cy="5772840"/>
-          </a:xfrm>
-        </p:spPr>
-        <p:txBody>
-          <a:bodyPr anchor="ctr">
-            <a:normAutofit/>
-          </a:bodyPr>
-          <a:lstStyle/>
-          <a:p>
-            <a:r>
-              <a:rPr lang="es-MX" sz="3600">
-                <a:solidFill>
-                  <a:srgbClr val="FFFFFF"/>
-                </a:solidFill>
-              </a:rPr>
-              <a:t>Permiso de uso del espectro</a:t>
-            </a:r>
-            <a:endParaRPr lang="en-US" sz="3600">
-              <a:solidFill>
-                <a:srgbClr val="FFFFFF"/>
-              </a:solidFill>
-            </a:endParaRPr>
-          </a:p>
-        </p:txBody>
-      </p:sp>
-      <p:sp>
-        <p:nvSpPr>
-          <p:cNvPr id="17" name="Rectangle 16">
-            <a:extLst>
-              <a:ext uri="{FF2B5EF4-FFF2-40B4-BE49-F238E27FC236}">
-                <a16:creationId xmlns:a16="http://schemas.microsoft.com/office/drawing/2014/main" id="{B7AF614F-5BC3-4086-99F5-B87C5847A071}"/>
-              </a:ext>
-              <a:ext uri="{C183D7F6-B498-43B3-948B-1728B52AA6E4}">
-                <adec:decorative xmlns:adec="http://schemas.microsoft.com/office/drawing/2017/decorative" val="1"/>
-              </a:ext>
-            </a:extLst>
-          </p:cNvPr>
-          <p:cNvSpPr>
-            <a:spLocks noGrp="1" noRot="1" noChangeAspect="1" noMove="1" noResize="1" noEditPoints="1" noAdjustHandles="1" noChangeArrowheads="1" noChangeShapeType="1" noTextEdit="1"/>
-          </p:cNvSpPr>
-          <p:nvPr>
-            <p:extLst>
-              <p:ext uri="{386F3935-93C4-4BCD-93E2-E3B085C9AB24}">
-                <p16:designElem xmlns:p16="http://schemas.microsoft.com/office/powerpoint/2015/main" val="1"/>
-              </p:ext>
-            </p:extLst>
-          </p:nvPr>
-        </p:nvSpPr>
-        <p:spPr>
-          <a:xfrm>
-            <a:off x="4040071" y="0"/>
-            <a:ext cx="64008" cy="6858000"/>
-          </a:xfrm>
-          <a:prstGeom prst="rect">
-            <a:avLst/>
-          </a:prstGeom>
-          <a:solidFill>
-            <a:schemeClr val="accent1"/>
-          </a:solidFill>
-          <a:ln>
-            <a:noFill/>
-          </a:ln>
-        </p:spPr>
-        <p:style>
-          <a:lnRef idx="2">
-            <a:schemeClr val="accent1">
-              <a:shade val="50000"/>
-            </a:schemeClr>
-          </a:lnRef>
-          <a:fillRef idx="1">
-            <a:schemeClr val="accent1"/>
-          </a:fillRef>
-          <a:effectRef idx="0">
-            <a:schemeClr val="accent1"/>
-          </a:effectRef>
-          <a:fontRef idx="minor">
-            <a:schemeClr val="lt1"/>
-          </a:fontRef>
-        </p:style>
-        <p:txBody>
-          <a:bodyPr/>
-          <a:lstStyle/>
-          <a:p>
-            <a:endParaRPr lang="en-US"/>
-          </a:p>
-        </p:txBody>
-      </p:sp>
-      <p:graphicFrame>
-        <p:nvGraphicFramePr>
-          <p:cNvPr id="18" name="Content Placeholder 2">
-            <a:extLst>
-              <a:ext uri="{FF2B5EF4-FFF2-40B4-BE49-F238E27FC236}">
-                <a16:creationId xmlns:a16="http://schemas.microsoft.com/office/drawing/2014/main" id="{2594009C-9F90-6B6A-4744-9F2052CFB623}"/>
-              </a:ext>
-            </a:extLst>
-          </p:cNvPr>
-          <p:cNvGraphicFramePr>
-            <a:graphicFrameLocks noGrp="1"/>
-          </p:cNvGraphicFramePr>
-          <p:nvPr>
-            <p:ph idx="1"/>
-            <p:extLst>
-              <p:ext uri="{D42A27DB-BD31-4B8C-83A1-F6EECF244321}">
-                <p14:modId xmlns:p14="http://schemas.microsoft.com/office/powerpoint/2010/main" val="597870093"/>
-              </p:ext>
-            </p:extLst>
-          </p:nvPr>
-        </p:nvGraphicFramePr>
-        <p:xfrm>
-          <a:off x="4741863" y="639763"/>
-          <a:ext cx="6797675" cy="5649912"/>
-        </p:xfrm>
-        <a:graphic>
-          <a:graphicData uri="http://schemas.openxmlformats.org/drawingml/2006/diagram">
-            <dgm:relIds xmlns:dgm="http://schemas.openxmlformats.org/drawingml/2006/diagram" xmlns:r="http://schemas.openxmlformats.org/officeDocument/2006/relationships" r:dm="rId2" r:lo="rId3" r:qs="rId4" r:cs="rId5"/>
-          </a:graphicData>
-        </a:graphic>
-      </p:graphicFrame>
-    </p:spTree>
-    <p:extLst>
-      <p:ext uri="{BB962C8B-B14F-4D97-AF65-F5344CB8AC3E}">
-        <p14:creationId xmlns:p14="http://schemas.microsoft.com/office/powerpoint/2010/main" val="2847761339"/>
-      </p:ext>
-    </p:extLst>
-  </p:cSld>
-  <p:clrMapOvr>
-    <a:masterClrMapping/>
-  </p:clrMapOvr>
-</p:sld>
-</file>
-
-<file path=ppt/slides/slide19.xml><?xml version="1.0" encoding="utf-8"?>
-<p:sld xmlns:a="http://schemas.openxmlformats.org/drawingml/2006/main" xmlns:r="http://schemas.openxmlformats.org/officeDocument/2006/relationships" xmlns:p="http://schemas.openxmlformats.org/presentationml/2006/main">
-  <p:cSld>
-    <p:spTree>
-      <p:nvGrpSpPr>
-        <p:cNvPr id="1" name=""/>
-        <p:cNvGrpSpPr/>
-        <p:nvPr/>
-      </p:nvGrpSpPr>
-      <p:grpSpPr>
-        <a:xfrm>
-          <a:off x="0" y="0"/>
-          <a:ext cx="0" cy="0"/>
-          <a:chOff x="0" y="0"/>
-          <a:chExt cx="0" cy="0"/>
-        </a:xfrm>
-      </p:grpSpPr>
-      <p:sp>
-        <p:nvSpPr>
-          <p:cNvPr id="2" name="Title 1">
-            <a:extLst>
-              <a:ext uri="{FF2B5EF4-FFF2-40B4-BE49-F238E27FC236}">
-                <a16:creationId xmlns:a16="http://schemas.microsoft.com/office/drawing/2014/main" id="{BB105FBC-4393-6439-9677-E192AC9D60F8}"/>
-              </a:ext>
-            </a:extLst>
-          </p:cNvPr>
-          <p:cNvSpPr>
-            <a:spLocks noGrp="1"/>
-          </p:cNvSpPr>
-          <p:nvPr>
-            <p:ph type="title"/>
-          </p:nvPr>
-        </p:nvSpPr>
-        <p:spPr/>
-        <p:txBody>
-          <a:bodyPr/>
-          <a:lstStyle/>
-          <a:p>
-            <a:r>
-              <a:rPr lang="es-MX" dirty="0"/>
-              <a:t>Tiempo del trámite de licencia</a:t>
-            </a:r>
-            <a:endParaRPr lang="en-US" dirty="0"/>
-          </a:p>
-        </p:txBody>
-      </p:sp>
-      <p:sp>
-        <p:nvSpPr>
-          <p:cNvPr id="3" name="Content Placeholder 2">
-            <a:extLst>
-              <a:ext uri="{FF2B5EF4-FFF2-40B4-BE49-F238E27FC236}">
-                <a16:creationId xmlns:a16="http://schemas.microsoft.com/office/drawing/2014/main" id="{384586B0-B667-4B99-C13C-2176FBBBED60}"/>
-              </a:ext>
-            </a:extLst>
-          </p:cNvPr>
-          <p:cNvSpPr>
-            <a:spLocks noGrp="1"/>
-          </p:cNvSpPr>
-          <p:nvPr>
-            <p:ph idx="1"/>
-          </p:nvPr>
-        </p:nvSpPr>
-        <p:spPr/>
-        <p:txBody>
-          <a:bodyPr>
-            <a:normAutofit/>
-          </a:bodyPr>
-          <a:lstStyle/>
-          <a:p>
-            <a:pPr>
-              <a:buFont typeface="Arial" panose="020B0604020202020204" pitchFamily="34" charset="0"/>
-              <a:buChar char="•"/>
-            </a:pPr>
-            <a:r>
-              <a:rPr lang="es-MX" dirty="0"/>
-              <a:t>Proceso de licencia de radioaficionado</a:t>
-            </a:r>
-          </a:p>
-          <a:p>
-            <a:pPr marL="457200" indent="-457200">
-              <a:buFont typeface="+mj-lt"/>
-              <a:buAutoNum type="arabicPeriod"/>
-            </a:pPr>
-            <a:r>
-              <a:rPr lang="es-MX" dirty="0"/>
-              <a:t>Revisión de solicitud MICITT</a:t>
-            </a:r>
-          </a:p>
-          <a:p>
-            <a:pPr marL="749808" lvl="1" indent="-457200"/>
-            <a:r>
-              <a:rPr lang="es-MX" dirty="0"/>
-              <a:t>5 días hábiles	</a:t>
-            </a:r>
-          </a:p>
-          <a:p>
-            <a:pPr marL="457200" indent="-457200">
-              <a:buFont typeface="+mj-lt"/>
-              <a:buAutoNum type="arabicPeriod"/>
-            </a:pPr>
-            <a:r>
-              <a:rPr lang="es-MX" dirty="0"/>
-              <a:t>Examen SUTEL</a:t>
-            </a:r>
-          </a:p>
-          <a:p>
-            <a:pPr marL="749808" lvl="1" indent="-457200"/>
-            <a:r>
-              <a:rPr lang="es-MX" dirty="0"/>
-              <a:t>Virtual: 10 días hábiles</a:t>
-            </a:r>
-          </a:p>
-          <a:p>
-            <a:pPr marL="749808" lvl="1" indent="-457200"/>
-            <a:r>
-              <a:rPr lang="es-MX" dirty="0"/>
-              <a:t>Presencial: 20 días hábiles</a:t>
-            </a:r>
-          </a:p>
-          <a:p>
-            <a:pPr marL="457200" indent="-457200">
-              <a:buFont typeface="+mj-lt"/>
-              <a:buAutoNum type="arabicPeriod"/>
-            </a:pPr>
-            <a:r>
-              <a:rPr lang="es-MX" dirty="0"/>
-              <a:t>Resultado del examen</a:t>
-            </a:r>
-          </a:p>
-          <a:p>
-            <a:pPr marL="749808" lvl="1" indent="-457200"/>
-            <a:r>
-              <a:rPr lang="es-MX" dirty="0"/>
-              <a:t>3 días hábiles</a:t>
-            </a:r>
-          </a:p>
-          <a:p>
-            <a:pPr marL="457200" indent="-457200">
-              <a:buFont typeface="+mj-lt"/>
-              <a:buAutoNum type="arabicPeriod"/>
-            </a:pPr>
-            <a:r>
-              <a:rPr lang="es-MX" dirty="0"/>
-              <a:t>Recomendación técnica de SUTEL</a:t>
-            </a:r>
-          </a:p>
-          <a:p>
-            <a:pPr marL="749808" lvl="1" indent="-457200"/>
-            <a:r>
-              <a:rPr lang="es-MX" dirty="0"/>
-              <a:t>Hasta 45 días hábiles</a:t>
-            </a:r>
-            <a:endParaRPr lang="en-US" dirty="0"/>
-          </a:p>
-        </p:txBody>
-      </p:sp>
-    </p:spTree>
-    <p:extLst>
-      <p:ext uri="{BB962C8B-B14F-4D97-AF65-F5344CB8AC3E}">
-        <p14:creationId xmlns:p14="http://schemas.microsoft.com/office/powerpoint/2010/main" val="1533584218"/>
       </p:ext>
     </p:extLst>
   </p:cSld>
@@ -34113,6 +33979,1253 @@
 <file path=ppt/slides/slide20.xml><?xml version="1.0" encoding="utf-8"?>
 <p:sld xmlns:a="http://schemas.openxmlformats.org/drawingml/2006/main" xmlns:r="http://schemas.openxmlformats.org/officeDocument/2006/relationships" xmlns:p="http://schemas.openxmlformats.org/presentationml/2006/main">
   <p:cSld>
+    <p:bg>
+      <p:bgPr>
+        <a:solidFill>
+          <a:schemeClr val="bg1"/>
+        </a:solidFill>
+        <a:effectLst/>
+      </p:bgPr>
+    </p:bg>
+    <p:spTree>
+      <p:nvGrpSpPr>
+        <p:cNvPr id="1" name=""/>
+        <p:cNvGrpSpPr/>
+        <p:nvPr/>
+      </p:nvGrpSpPr>
+      <p:grpSpPr>
+        <a:xfrm>
+          <a:off x="0" y="0"/>
+          <a:ext cx="0" cy="0"/>
+          <a:chOff x="0" y="0"/>
+          <a:chExt cx="0" cy="0"/>
+        </a:xfrm>
+      </p:grpSpPr>
+      <p:sp useBgFill="1">
+        <p:nvSpPr>
+          <p:cNvPr id="8" name="Rectangle 7">
+            <a:extLst>
+              <a:ext uri="{FF2B5EF4-FFF2-40B4-BE49-F238E27FC236}">
+                <a16:creationId xmlns:a16="http://schemas.microsoft.com/office/drawing/2014/main" id="{3741B58E-3B65-4A01-A276-975AB2CF8A08}"/>
+              </a:ext>
+              <a:ext uri="{C183D7F6-B498-43B3-948B-1728B52AA6E4}">
+                <adec:decorative xmlns:adec="http://schemas.microsoft.com/office/drawing/2017/decorative" val="1"/>
+              </a:ext>
+            </a:extLst>
+          </p:cNvPr>
+          <p:cNvSpPr>
+            <a:spLocks noGrp="1" noRot="1" noChangeAspect="1" noMove="1" noResize="1" noEditPoints="1" noAdjustHandles="1" noChangeArrowheads="1" noChangeShapeType="1" noTextEdit="1"/>
+          </p:cNvSpPr>
+          <p:nvPr>
+            <p:extLst>
+              <p:ext uri="{386F3935-93C4-4BCD-93E2-E3B085C9AB24}">
+                <p16:designElem xmlns:p16="http://schemas.microsoft.com/office/powerpoint/2015/main" val="1"/>
+              </p:ext>
+            </p:extLst>
+          </p:nvPr>
+        </p:nvSpPr>
+        <p:spPr>
+          <a:xfrm>
+            <a:off x="0" y="0"/>
+            <a:ext cx="12186315" cy="6858000"/>
+          </a:xfrm>
+          <a:prstGeom prst="rect">
+            <a:avLst/>
+          </a:prstGeom>
+          <a:ln>
+            <a:noFill/>
+          </a:ln>
+        </p:spPr>
+        <p:style>
+          <a:lnRef idx="2">
+            <a:schemeClr val="accent6">
+              <a:shade val="50000"/>
+            </a:schemeClr>
+          </a:lnRef>
+          <a:fillRef idx="1001">
+            <a:schemeClr val="lt1"/>
+          </a:fillRef>
+          <a:effectRef idx="0">
+            <a:schemeClr val="accent6"/>
+          </a:effectRef>
+          <a:fontRef idx="minor">
+            <a:schemeClr val="lt1"/>
+          </a:fontRef>
+        </p:style>
+        <p:txBody>
+          <a:bodyPr rtlCol="0" anchor="ctr"/>
+          <a:lstStyle/>
+          <a:p>
+            <a:pPr algn="ctr"/>
+            <a:endParaRPr lang="en-US"/>
+          </a:p>
+        </p:txBody>
+      </p:sp>
+      <p:sp>
+        <p:nvSpPr>
+          <p:cNvPr id="10" name="Rectangle 9">
+            <a:extLst>
+              <a:ext uri="{FF2B5EF4-FFF2-40B4-BE49-F238E27FC236}">
+                <a16:creationId xmlns:a16="http://schemas.microsoft.com/office/drawing/2014/main" id="{7AAC67C3-831B-4AB1-A259-DFB839CAFAFC}"/>
+              </a:ext>
+              <a:ext uri="{C183D7F6-B498-43B3-948B-1728B52AA6E4}">
+                <adec:decorative xmlns:adec="http://schemas.microsoft.com/office/drawing/2017/decorative" val="1"/>
+              </a:ext>
+            </a:extLst>
+          </p:cNvPr>
+          <p:cNvSpPr>
+            <a:spLocks noGrp="1" noRot="1" noChangeAspect="1" noMove="1" noResize="1" noEditPoints="1" noAdjustHandles="1" noChangeArrowheads="1" noChangeShapeType="1" noTextEdit="1"/>
+          </p:cNvSpPr>
+          <p:nvPr>
+            <p:extLst>
+              <p:ext uri="{386F3935-93C4-4BCD-93E2-E3B085C9AB24}">
+                <p16:designElem xmlns:p16="http://schemas.microsoft.com/office/powerpoint/2015/main" val="1"/>
+              </p:ext>
+            </p:extLst>
+          </p:nvPr>
+        </p:nvSpPr>
+        <p:spPr>
+          <a:xfrm>
+            <a:off x="16" y="0"/>
+            <a:ext cx="4050791" cy="6858000"/>
+          </a:xfrm>
+          <a:prstGeom prst="rect">
+            <a:avLst/>
+          </a:prstGeom>
+          <a:solidFill>
+            <a:schemeClr val="accent2"/>
+          </a:solidFill>
+          <a:ln>
+            <a:noFill/>
+          </a:ln>
+        </p:spPr>
+        <p:style>
+          <a:lnRef idx="2">
+            <a:schemeClr val="accent1">
+              <a:shade val="50000"/>
+            </a:schemeClr>
+          </a:lnRef>
+          <a:fillRef idx="1">
+            <a:schemeClr val="accent1"/>
+          </a:fillRef>
+          <a:effectRef idx="0">
+            <a:schemeClr val="accent1"/>
+          </a:effectRef>
+          <a:fontRef idx="minor">
+            <a:schemeClr val="lt1"/>
+          </a:fontRef>
+        </p:style>
+        <p:txBody>
+          <a:bodyPr/>
+          <a:lstStyle/>
+          <a:p>
+            <a:endParaRPr lang="en-US"/>
+          </a:p>
+        </p:txBody>
+      </p:sp>
+      <p:sp>
+        <p:nvSpPr>
+          <p:cNvPr id="2" name="Title 1">
+            <a:extLst>
+              <a:ext uri="{FF2B5EF4-FFF2-40B4-BE49-F238E27FC236}">
+                <a16:creationId xmlns:a16="http://schemas.microsoft.com/office/drawing/2014/main" id="{65CD047D-90F9-659F-EE93-AAD8C3790A3B}"/>
+              </a:ext>
+            </a:extLst>
+          </p:cNvPr>
+          <p:cNvSpPr>
+            <a:spLocks noGrp="1"/>
+          </p:cNvSpPr>
+          <p:nvPr>
+            <p:ph type="title"/>
+          </p:nvPr>
+        </p:nvSpPr>
+        <p:spPr>
+          <a:xfrm>
+            <a:off x="492370" y="605896"/>
+            <a:ext cx="3084844" cy="5646208"/>
+          </a:xfrm>
+        </p:spPr>
+        <p:txBody>
+          <a:bodyPr anchor="ctr">
+            <a:normAutofit/>
+          </a:bodyPr>
+          <a:lstStyle/>
+          <a:p>
+            <a:r>
+              <a:rPr lang="en-US" sz="3600">
+                <a:solidFill>
+                  <a:srgbClr val="FFFFFF"/>
+                </a:solidFill>
+              </a:rPr>
+              <a:t>Qué define el PNAF</a:t>
+            </a:r>
+          </a:p>
+        </p:txBody>
+      </p:sp>
+      <p:sp>
+        <p:nvSpPr>
+          <p:cNvPr id="12" name="Rectangle 11">
+            <a:extLst>
+              <a:ext uri="{FF2B5EF4-FFF2-40B4-BE49-F238E27FC236}">
+                <a16:creationId xmlns:a16="http://schemas.microsoft.com/office/drawing/2014/main" id="{054B3F04-9EAC-45C0-B3CE-0387EEA10A0C}"/>
+              </a:ext>
+              <a:ext uri="{C183D7F6-B498-43B3-948B-1728B52AA6E4}">
+                <adec:decorative xmlns:adec="http://schemas.microsoft.com/office/drawing/2017/decorative" val="1"/>
+              </a:ext>
+            </a:extLst>
+          </p:cNvPr>
+          <p:cNvSpPr>
+            <a:spLocks noGrp="1" noRot="1" noChangeAspect="1" noMove="1" noResize="1" noEditPoints="1" noAdjustHandles="1" noChangeArrowheads="1" noChangeShapeType="1" noTextEdit="1"/>
+          </p:cNvSpPr>
+          <p:nvPr>
+            <p:extLst>
+              <p:ext uri="{386F3935-93C4-4BCD-93E2-E3B085C9AB24}">
+                <p16:designElem xmlns:p16="http://schemas.microsoft.com/office/powerpoint/2015/main" val="1"/>
+              </p:ext>
+            </p:extLst>
+          </p:nvPr>
+        </p:nvSpPr>
+        <p:spPr>
+          <a:xfrm>
+            <a:off x="4040071" y="0"/>
+            <a:ext cx="64008" cy="6858000"/>
+          </a:xfrm>
+          <a:prstGeom prst="rect">
+            <a:avLst/>
+          </a:prstGeom>
+          <a:solidFill>
+            <a:schemeClr val="accent1"/>
+          </a:solidFill>
+          <a:ln>
+            <a:noFill/>
+          </a:ln>
+        </p:spPr>
+        <p:style>
+          <a:lnRef idx="2">
+            <a:schemeClr val="accent1">
+              <a:shade val="50000"/>
+            </a:schemeClr>
+          </a:lnRef>
+          <a:fillRef idx="1">
+            <a:schemeClr val="accent1"/>
+          </a:fillRef>
+          <a:effectRef idx="0">
+            <a:schemeClr val="accent1"/>
+          </a:effectRef>
+          <a:fontRef idx="minor">
+            <a:schemeClr val="lt1"/>
+          </a:fontRef>
+        </p:style>
+        <p:txBody>
+          <a:bodyPr/>
+          <a:lstStyle/>
+          <a:p>
+            <a:endParaRPr lang="en-US"/>
+          </a:p>
+        </p:txBody>
+      </p:sp>
+      <p:sp>
+        <p:nvSpPr>
+          <p:cNvPr id="3" name="Content Placeholder 2">
+            <a:extLst>
+              <a:ext uri="{FF2B5EF4-FFF2-40B4-BE49-F238E27FC236}">
+                <a16:creationId xmlns:a16="http://schemas.microsoft.com/office/drawing/2014/main" id="{1E26DE09-DAD3-B592-9195-BFB565EDC21C}"/>
+              </a:ext>
+            </a:extLst>
+          </p:cNvPr>
+          <p:cNvSpPr>
+            <a:spLocks noGrp="1"/>
+          </p:cNvSpPr>
+          <p:nvPr>
+            <p:ph idx="1"/>
+          </p:nvPr>
+        </p:nvSpPr>
+        <p:spPr>
+          <a:xfrm>
+            <a:off x="4742016" y="605896"/>
+            <a:ext cx="6413663" cy="5646208"/>
+          </a:xfrm>
+        </p:spPr>
+        <p:txBody>
+          <a:bodyPr anchor="ctr">
+            <a:normAutofit/>
+          </a:bodyPr>
+          <a:lstStyle/>
+          <a:p>
+            <a:pPr>
+              <a:buFont typeface="Arial" panose="020B0604020202020204" pitchFamily="34" charset="0"/>
+              <a:buChar char="•"/>
+            </a:pPr>
+            <a:r>
+              <a:rPr lang="es-MX" dirty="0"/>
+              <a:t>El PNAF establece:</a:t>
+            </a:r>
+          </a:p>
+          <a:p>
+            <a:pPr lvl="1">
+              <a:buFont typeface="Arial" panose="020B0604020202020204" pitchFamily="34" charset="0"/>
+              <a:buChar char="•"/>
+            </a:pPr>
+            <a:r>
+              <a:rPr lang="es-MX" dirty="0"/>
+              <a:t>Bandas asignadas a cada servicio</a:t>
+            </a:r>
+          </a:p>
+          <a:p>
+            <a:pPr lvl="2">
+              <a:buFont typeface="Arial" panose="020B0604020202020204" pitchFamily="34" charset="0"/>
+              <a:buChar char="•"/>
+            </a:pPr>
+            <a:r>
+              <a:rPr lang="es-MX" dirty="0"/>
+              <a:t>Radiodifusión</a:t>
+            </a:r>
+          </a:p>
+          <a:p>
+            <a:pPr lvl="2">
+              <a:buFont typeface="Arial" panose="020B0604020202020204" pitchFamily="34" charset="0"/>
+              <a:buChar char="•"/>
+            </a:pPr>
+            <a:r>
+              <a:rPr lang="es-MX" dirty="0"/>
+              <a:t>Móvil</a:t>
+            </a:r>
+          </a:p>
+          <a:p>
+            <a:pPr lvl="2">
+              <a:buFont typeface="Arial" panose="020B0604020202020204" pitchFamily="34" charset="0"/>
+              <a:buChar char="•"/>
+            </a:pPr>
+            <a:r>
+              <a:rPr lang="es-MX" dirty="0"/>
+              <a:t>Satelital</a:t>
+            </a:r>
+          </a:p>
+          <a:p>
+            <a:pPr lvl="2">
+              <a:buFont typeface="Arial" panose="020B0604020202020204" pitchFamily="34" charset="0"/>
+              <a:buChar char="•"/>
+            </a:pPr>
+            <a:r>
+              <a:rPr lang="es-MX" dirty="0"/>
+              <a:t>Radioaficionados</a:t>
+            </a:r>
+          </a:p>
+          <a:p>
+            <a:pPr lvl="1">
+              <a:buFont typeface="Arial" panose="020B0604020202020204" pitchFamily="34" charset="0"/>
+              <a:buChar char="•"/>
+            </a:pPr>
+            <a:r>
+              <a:rPr lang="es-MX" dirty="0"/>
+              <a:t>Bandas de uso libre</a:t>
+            </a:r>
+          </a:p>
+          <a:p>
+            <a:pPr lvl="1">
+              <a:buFont typeface="Arial" panose="020B0604020202020204" pitchFamily="34" charset="0"/>
+              <a:buChar char="•"/>
+            </a:pPr>
+            <a:r>
+              <a:rPr lang="es-MX" dirty="0"/>
+              <a:t>Bandas que requieren licencia o concesión</a:t>
+            </a:r>
+          </a:p>
+          <a:p>
+            <a:pPr lvl="1">
+              <a:buFont typeface="Arial" panose="020B0604020202020204" pitchFamily="34" charset="0"/>
+              <a:buChar char="•"/>
+            </a:pPr>
+            <a:r>
+              <a:rPr lang="es-MX" dirty="0"/>
+              <a:t>Límites técnicos:</a:t>
+            </a:r>
+          </a:p>
+          <a:p>
+            <a:pPr lvl="2">
+              <a:buFont typeface="Arial" panose="020B0604020202020204" pitchFamily="34" charset="0"/>
+              <a:buChar char="•"/>
+            </a:pPr>
+            <a:r>
+              <a:rPr lang="es-MX" dirty="0"/>
+              <a:t>Potencia máxima</a:t>
+            </a:r>
+          </a:p>
+          <a:p>
+            <a:pPr lvl="2">
+              <a:buFont typeface="Arial" panose="020B0604020202020204" pitchFamily="34" charset="0"/>
+              <a:buChar char="•"/>
+            </a:pPr>
+            <a:r>
+              <a:rPr lang="es-MX" dirty="0"/>
+              <a:t>Condiciones de operación</a:t>
+            </a:r>
+            <a:endParaRPr lang="en-US" dirty="0"/>
+          </a:p>
+        </p:txBody>
+      </p:sp>
+    </p:spTree>
+    <p:extLst>
+      <p:ext uri="{BB962C8B-B14F-4D97-AF65-F5344CB8AC3E}">
+        <p14:creationId xmlns:p14="http://schemas.microsoft.com/office/powerpoint/2010/main" val="426939672"/>
+      </p:ext>
+    </p:extLst>
+  </p:cSld>
+  <p:clrMapOvr>
+    <a:masterClrMapping/>
+  </p:clrMapOvr>
+</p:sld>
+</file>
+
+<file path=ppt/slides/slide21.xml><?xml version="1.0" encoding="utf-8"?>
+<p:sld xmlns:a="http://schemas.openxmlformats.org/drawingml/2006/main" xmlns:r="http://schemas.openxmlformats.org/officeDocument/2006/relationships" xmlns:p="http://schemas.openxmlformats.org/presentationml/2006/main">
+  <p:cSld>
+    <p:spTree>
+      <p:nvGrpSpPr>
+        <p:cNvPr id="1" name=""/>
+        <p:cNvGrpSpPr/>
+        <p:nvPr/>
+      </p:nvGrpSpPr>
+      <p:grpSpPr>
+        <a:xfrm>
+          <a:off x="0" y="0"/>
+          <a:ext cx="0" cy="0"/>
+          <a:chOff x="0" y="0"/>
+          <a:chExt cx="0" cy="0"/>
+        </a:xfrm>
+      </p:grpSpPr>
+      <p:sp>
+        <p:nvSpPr>
+          <p:cNvPr id="2" name="Title 1">
+            <a:extLst>
+              <a:ext uri="{FF2B5EF4-FFF2-40B4-BE49-F238E27FC236}">
+                <a16:creationId xmlns:a16="http://schemas.microsoft.com/office/drawing/2014/main" id="{D73A1A86-0AB4-0EED-5712-7C4F4FE25045}"/>
+              </a:ext>
+            </a:extLst>
+          </p:cNvPr>
+          <p:cNvSpPr>
+            <a:spLocks noGrp="1"/>
+          </p:cNvSpPr>
+          <p:nvPr>
+            <p:ph type="title"/>
+          </p:nvPr>
+        </p:nvSpPr>
+        <p:spPr/>
+        <p:txBody>
+          <a:bodyPr/>
+          <a:lstStyle/>
+          <a:p>
+            <a:r>
+              <a:rPr lang="en-US" dirty="0" err="1"/>
+              <a:t>Importancia</a:t>
+            </a:r>
+            <a:r>
+              <a:rPr lang="en-US" dirty="0"/>
+              <a:t> del PNAF para LoRa/APRS</a:t>
+            </a:r>
+          </a:p>
+        </p:txBody>
+      </p:sp>
+      <p:graphicFrame>
+        <p:nvGraphicFramePr>
+          <p:cNvPr id="5" name="Content Placeholder 2">
+            <a:extLst>
+              <a:ext uri="{FF2B5EF4-FFF2-40B4-BE49-F238E27FC236}">
+                <a16:creationId xmlns:a16="http://schemas.microsoft.com/office/drawing/2014/main" id="{7B9E6B43-32D4-9B6E-23CD-8074EB349B7C}"/>
+              </a:ext>
+            </a:extLst>
+          </p:cNvPr>
+          <p:cNvGraphicFramePr>
+            <a:graphicFrameLocks noGrp="1"/>
+          </p:cNvGraphicFramePr>
+          <p:nvPr>
+            <p:ph idx="1"/>
+          </p:nvPr>
+        </p:nvGraphicFramePr>
+        <p:xfrm>
+          <a:off x="1097280" y="1845734"/>
+          <a:ext cx="10058400" cy="4023360"/>
+        </p:xfrm>
+        <a:graphic>
+          <a:graphicData uri="http://schemas.openxmlformats.org/drawingml/2006/diagram">
+            <dgm:relIds xmlns:dgm="http://schemas.openxmlformats.org/drawingml/2006/diagram" xmlns:r="http://schemas.openxmlformats.org/officeDocument/2006/relationships" r:dm="rId2" r:lo="rId3" r:qs="rId4" r:cs="rId5"/>
+          </a:graphicData>
+        </a:graphic>
+      </p:graphicFrame>
+    </p:spTree>
+    <p:extLst>
+      <p:ext uri="{BB962C8B-B14F-4D97-AF65-F5344CB8AC3E}">
+        <p14:creationId xmlns:p14="http://schemas.microsoft.com/office/powerpoint/2010/main" val="4256257207"/>
+      </p:ext>
+    </p:extLst>
+  </p:cSld>
+  <p:clrMapOvr>
+    <a:masterClrMapping/>
+  </p:clrMapOvr>
+</p:sld>
+</file>
+
+<file path=ppt/slides/slide22.xml><?xml version="1.0" encoding="utf-8"?>
+<p:sld xmlns:a="http://schemas.openxmlformats.org/drawingml/2006/main" xmlns:r="http://schemas.openxmlformats.org/officeDocument/2006/relationships" xmlns:p="http://schemas.openxmlformats.org/presentationml/2006/main">
+  <p:cSld>
+    <p:bg>
+      <p:bgPr>
+        <a:solidFill>
+          <a:schemeClr val="bg1"/>
+        </a:solidFill>
+        <a:effectLst/>
+      </p:bgPr>
+    </p:bg>
+    <p:spTree>
+      <p:nvGrpSpPr>
+        <p:cNvPr id="1" name=""/>
+        <p:cNvGrpSpPr/>
+        <p:nvPr/>
+      </p:nvGrpSpPr>
+      <p:grpSpPr>
+        <a:xfrm>
+          <a:off x="0" y="0"/>
+          <a:ext cx="0" cy="0"/>
+          <a:chOff x="0" y="0"/>
+          <a:chExt cx="0" cy="0"/>
+        </a:xfrm>
+      </p:grpSpPr>
+      <p:sp useBgFill="1">
+        <p:nvSpPr>
+          <p:cNvPr id="9" name="Rectangle 8">
+            <a:extLst>
+              <a:ext uri="{FF2B5EF4-FFF2-40B4-BE49-F238E27FC236}">
+                <a16:creationId xmlns:a16="http://schemas.microsoft.com/office/drawing/2014/main" id="{FB5993E2-C02B-4335-ABA5-D8EC465551E3}"/>
+              </a:ext>
+              <a:ext uri="{C183D7F6-B498-43B3-948B-1728B52AA6E4}">
+                <adec:decorative xmlns:adec="http://schemas.microsoft.com/office/drawing/2017/decorative" val="1"/>
+              </a:ext>
+            </a:extLst>
+          </p:cNvPr>
+          <p:cNvSpPr>
+            <a:spLocks noGrp="1" noRot="1" noChangeAspect="1" noMove="1" noResize="1" noEditPoints="1" noAdjustHandles="1" noChangeArrowheads="1" noChangeShapeType="1" noTextEdit="1"/>
+          </p:cNvSpPr>
+          <p:nvPr>
+            <p:extLst>
+              <p:ext uri="{386F3935-93C4-4BCD-93E2-E3B085C9AB24}">
+                <p16:designElem xmlns:p16="http://schemas.microsoft.com/office/powerpoint/2015/main" val="1"/>
+              </p:ext>
+            </p:extLst>
+          </p:nvPr>
+        </p:nvSpPr>
+        <p:spPr>
+          <a:xfrm>
+            <a:off x="0" y="0"/>
+            <a:ext cx="12186315" cy="6858000"/>
+          </a:xfrm>
+          <a:prstGeom prst="rect">
+            <a:avLst/>
+          </a:prstGeom>
+          <a:ln>
+            <a:noFill/>
+          </a:ln>
+        </p:spPr>
+        <p:style>
+          <a:lnRef idx="2">
+            <a:schemeClr val="accent6">
+              <a:shade val="50000"/>
+            </a:schemeClr>
+          </a:lnRef>
+          <a:fillRef idx="1001">
+            <a:schemeClr val="lt1"/>
+          </a:fillRef>
+          <a:effectRef idx="0">
+            <a:schemeClr val="accent6"/>
+          </a:effectRef>
+          <a:fontRef idx="minor">
+            <a:schemeClr val="lt1"/>
+          </a:fontRef>
+        </p:style>
+        <p:txBody>
+          <a:bodyPr rtlCol="0" anchor="ctr"/>
+          <a:lstStyle/>
+          <a:p>
+            <a:pPr algn="ctr"/>
+            <a:endParaRPr lang="en-US"/>
+          </a:p>
+        </p:txBody>
+      </p:sp>
+      <p:sp>
+        <p:nvSpPr>
+          <p:cNvPr id="11" name="Rectangle 10">
+            <a:extLst>
+              <a:ext uri="{FF2B5EF4-FFF2-40B4-BE49-F238E27FC236}">
+                <a16:creationId xmlns:a16="http://schemas.microsoft.com/office/drawing/2014/main" id="{C0B801A2-5622-4BE8-9AD2-C337A2CD0022}"/>
+              </a:ext>
+              <a:ext uri="{C183D7F6-B498-43B3-948B-1728B52AA6E4}">
+                <adec:decorative xmlns:adec="http://schemas.microsoft.com/office/drawing/2017/decorative" val="1"/>
+              </a:ext>
+            </a:extLst>
+          </p:cNvPr>
+          <p:cNvSpPr>
+            <a:spLocks noGrp="1" noRot="1" noChangeAspect="1" noMove="1" noResize="1" noEditPoints="1" noAdjustHandles="1" noChangeArrowheads="1" noChangeShapeType="1" noTextEdit="1"/>
+          </p:cNvSpPr>
+          <p:nvPr>
+            <p:extLst>
+              <p:ext uri="{386F3935-93C4-4BCD-93E2-E3B085C9AB24}">
+                <p16:designElem xmlns:p16="http://schemas.microsoft.com/office/powerpoint/2015/main" val="1"/>
+              </p:ext>
+            </p:extLst>
+          </p:nvPr>
+        </p:nvSpPr>
+        <p:spPr>
+          <a:xfrm>
+            <a:off x="16" y="0"/>
+            <a:ext cx="4050791" cy="6858000"/>
+          </a:xfrm>
+          <a:prstGeom prst="rect">
+            <a:avLst/>
+          </a:prstGeom>
+          <a:solidFill>
+            <a:schemeClr val="accent2"/>
+          </a:solidFill>
+          <a:ln>
+            <a:noFill/>
+          </a:ln>
+        </p:spPr>
+        <p:style>
+          <a:lnRef idx="2">
+            <a:schemeClr val="accent1">
+              <a:shade val="50000"/>
+            </a:schemeClr>
+          </a:lnRef>
+          <a:fillRef idx="1">
+            <a:schemeClr val="accent1"/>
+          </a:fillRef>
+          <a:effectRef idx="0">
+            <a:schemeClr val="accent1"/>
+          </a:effectRef>
+          <a:fontRef idx="minor">
+            <a:schemeClr val="lt1"/>
+          </a:fontRef>
+        </p:style>
+        <p:txBody>
+          <a:bodyPr/>
+          <a:lstStyle/>
+          <a:p>
+            <a:endParaRPr lang="en-US"/>
+          </a:p>
+        </p:txBody>
+      </p:sp>
+      <p:sp>
+        <p:nvSpPr>
+          <p:cNvPr id="2" name="Title 1">
+            <a:extLst>
+              <a:ext uri="{FF2B5EF4-FFF2-40B4-BE49-F238E27FC236}">
+                <a16:creationId xmlns:a16="http://schemas.microsoft.com/office/drawing/2014/main" id="{183149AA-E1C8-0B50-DA75-023F6A89216C}"/>
+              </a:ext>
+            </a:extLst>
+          </p:cNvPr>
+          <p:cNvSpPr>
+            <a:spLocks noGrp="1"/>
+          </p:cNvSpPr>
+          <p:nvPr>
+            <p:ph type="title"/>
+          </p:nvPr>
+        </p:nvSpPr>
+        <p:spPr>
+          <a:xfrm>
+            <a:off x="492370" y="516835"/>
+            <a:ext cx="3084844" cy="5772840"/>
+          </a:xfrm>
+        </p:spPr>
+        <p:txBody>
+          <a:bodyPr anchor="ctr">
+            <a:normAutofit/>
+          </a:bodyPr>
+          <a:lstStyle/>
+          <a:p>
+            <a:r>
+              <a:rPr lang="en-US" sz="3600">
+                <a:solidFill>
+                  <a:srgbClr val="FFFFFF"/>
+                </a:solidFill>
+              </a:rPr>
+              <a:t>Permisos requeridos</a:t>
+            </a:r>
+          </a:p>
+        </p:txBody>
+      </p:sp>
+      <p:sp>
+        <p:nvSpPr>
+          <p:cNvPr id="13" name="Rectangle 12">
+            <a:extLst>
+              <a:ext uri="{FF2B5EF4-FFF2-40B4-BE49-F238E27FC236}">
+                <a16:creationId xmlns:a16="http://schemas.microsoft.com/office/drawing/2014/main" id="{B7AF614F-5BC3-4086-99F5-B87C5847A071}"/>
+              </a:ext>
+              <a:ext uri="{C183D7F6-B498-43B3-948B-1728B52AA6E4}">
+                <adec:decorative xmlns:adec="http://schemas.microsoft.com/office/drawing/2017/decorative" val="1"/>
+              </a:ext>
+            </a:extLst>
+          </p:cNvPr>
+          <p:cNvSpPr>
+            <a:spLocks noGrp="1" noRot="1" noChangeAspect="1" noMove="1" noResize="1" noEditPoints="1" noAdjustHandles="1" noChangeArrowheads="1" noChangeShapeType="1" noTextEdit="1"/>
+          </p:cNvSpPr>
+          <p:nvPr>
+            <p:extLst>
+              <p:ext uri="{386F3935-93C4-4BCD-93E2-E3B085C9AB24}">
+                <p16:designElem xmlns:p16="http://schemas.microsoft.com/office/powerpoint/2015/main" val="1"/>
+              </p:ext>
+            </p:extLst>
+          </p:nvPr>
+        </p:nvSpPr>
+        <p:spPr>
+          <a:xfrm>
+            <a:off x="4040071" y="0"/>
+            <a:ext cx="64008" cy="6858000"/>
+          </a:xfrm>
+          <a:prstGeom prst="rect">
+            <a:avLst/>
+          </a:prstGeom>
+          <a:solidFill>
+            <a:schemeClr val="accent1"/>
+          </a:solidFill>
+          <a:ln>
+            <a:noFill/>
+          </a:ln>
+        </p:spPr>
+        <p:style>
+          <a:lnRef idx="2">
+            <a:schemeClr val="accent1">
+              <a:shade val="50000"/>
+            </a:schemeClr>
+          </a:lnRef>
+          <a:fillRef idx="1">
+            <a:schemeClr val="accent1"/>
+          </a:fillRef>
+          <a:effectRef idx="0">
+            <a:schemeClr val="accent1"/>
+          </a:effectRef>
+          <a:fontRef idx="minor">
+            <a:schemeClr val="lt1"/>
+          </a:fontRef>
+        </p:style>
+        <p:txBody>
+          <a:bodyPr/>
+          <a:lstStyle/>
+          <a:p>
+            <a:endParaRPr lang="en-US"/>
+          </a:p>
+        </p:txBody>
+      </p:sp>
+      <p:graphicFrame>
+        <p:nvGraphicFramePr>
+          <p:cNvPr id="5" name="Content Placeholder 2">
+            <a:extLst>
+              <a:ext uri="{FF2B5EF4-FFF2-40B4-BE49-F238E27FC236}">
+                <a16:creationId xmlns:a16="http://schemas.microsoft.com/office/drawing/2014/main" id="{015FA51F-EF08-0D77-A722-A57B93D8027E}"/>
+              </a:ext>
+            </a:extLst>
+          </p:cNvPr>
+          <p:cNvGraphicFramePr>
+            <a:graphicFrameLocks noGrp="1"/>
+          </p:cNvGraphicFramePr>
+          <p:nvPr>
+            <p:ph idx="1"/>
+            <p:extLst>
+              <p:ext uri="{D42A27DB-BD31-4B8C-83A1-F6EECF244321}">
+                <p14:modId xmlns:p14="http://schemas.microsoft.com/office/powerpoint/2010/main" val="346213692"/>
+              </p:ext>
+            </p:extLst>
+          </p:nvPr>
+        </p:nvGraphicFramePr>
+        <p:xfrm>
+          <a:off x="4741863" y="639763"/>
+          <a:ext cx="6797675" cy="5649912"/>
+        </p:xfrm>
+        <a:graphic>
+          <a:graphicData uri="http://schemas.openxmlformats.org/drawingml/2006/diagram">
+            <dgm:relIds xmlns:dgm="http://schemas.openxmlformats.org/drawingml/2006/diagram" xmlns:r="http://schemas.openxmlformats.org/officeDocument/2006/relationships" r:dm="rId2" r:lo="rId3" r:qs="rId4" r:cs="rId5"/>
+          </a:graphicData>
+        </a:graphic>
+      </p:graphicFrame>
+    </p:spTree>
+    <p:extLst>
+      <p:ext uri="{BB962C8B-B14F-4D97-AF65-F5344CB8AC3E}">
+        <p14:creationId xmlns:p14="http://schemas.microsoft.com/office/powerpoint/2010/main" val="375664245"/>
+      </p:ext>
+    </p:extLst>
+  </p:cSld>
+  <p:clrMapOvr>
+    <a:masterClrMapping/>
+  </p:clrMapOvr>
+</p:sld>
+</file>
+
+<file path=ppt/slides/slide23.xml><?xml version="1.0" encoding="utf-8"?>
+<p:sld xmlns:a="http://schemas.openxmlformats.org/drawingml/2006/main" xmlns:r="http://schemas.openxmlformats.org/officeDocument/2006/relationships" xmlns:p="http://schemas.openxmlformats.org/presentationml/2006/main">
+  <p:cSld>
+    <p:bg>
+      <p:bgPr>
+        <a:solidFill>
+          <a:schemeClr val="bg1"/>
+        </a:solidFill>
+        <a:effectLst/>
+      </p:bgPr>
+    </p:bg>
+    <p:spTree>
+      <p:nvGrpSpPr>
+        <p:cNvPr id="1" name=""/>
+        <p:cNvGrpSpPr/>
+        <p:nvPr/>
+      </p:nvGrpSpPr>
+      <p:grpSpPr>
+        <a:xfrm>
+          <a:off x="0" y="0"/>
+          <a:ext cx="0" cy="0"/>
+          <a:chOff x="0" y="0"/>
+          <a:chExt cx="0" cy="0"/>
+        </a:xfrm>
+      </p:grpSpPr>
+      <p:sp useBgFill="1">
+        <p:nvSpPr>
+          <p:cNvPr id="15" name="Rectangle 14">
+            <a:extLst>
+              <a:ext uri="{FF2B5EF4-FFF2-40B4-BE49-F238E27FC236}">
+                <a16:creationId xmlns:a16="http://schemas.microsoft.com/office/drawing/2014/main" id="{FB5993E2-C02B-4335-ABA5-D8EC465551E3}"/>
+              </a:ext>
+              <a:ext uri="{C183D7F6-B498-43B3-948B-1728B52AA6E4}">
+                <adec:decorative xmlns:adec="http://schemas.microsoft.com/office/drawing/2017/decorative" val="1"/>
+              </a:ext>
+            </a:extLst>
+          </p:cNvPr>
+          <p:cNvSpPr>
+            <a:spLocks noGrp="1" noRot="1" noChangeAspect="1" noMove="1" noResize="1" noEditPoints="1" noAdjustHandles="1" noChangeArrowheads="1" noChangeShapeType="1" noTextEdit="1"/>
+          </p:cNvSpPr>
+          <p:nvPr>
+            <p:extLst>
+              <p:ext uri="{386F3935-93C4-4BCD-93E2-E3B085C9AB24}">
+                <p16:designElem xmlns:p16="http://schemas.microsoft.com/office/powerpoint/2015/main" val="1"/>
+              </p:ext>
+            </p:extLst>
+          </p:nvPr>
+        </p:nvSpPr>
+        <p:spPr>
+          <a:xfrm>
+            <a:off x="0" y="0"/>
+            <a:ext cx="12186315" cy="6858000"/>
+          </a:xfrm>
+          <a:prstGeom prst="rect">
+            <a:avLst/>
+          </a:prstGeom>
+          <a:ln>
+            <a:noFill/>
+          </a:ln>
+        </p:spPr>
+        <p:style>
+          <a:lnRef idx="2">
+            <a:schemeClr val="accent6">
+              <a:shade val="50000"/>
+            </a:schemeClr>
+          </a:lnRef>
+          <a:fillRef idx="1001">
+            <a:schemeClr val="lt1"/>
+          </a:fillRef>
+          <a:effectRef idx="0">
+            <a:schemeClr val="accent6"/>
+          </a:effectRef>
+          <a:fontRef idx="minor">
+            <a:schemeClr val="lt1"/>
+          </a:fontRef>
+        </p:style>
+        <p:txBody>
+          <a:bodyPr rtlCol="0" anchor="ctr"/>
+          <a:lstStyle/>
+          <a:p>
+            <a:pPr algn="ctr"/>
+            <a:endParaRPr lang="en-US"/>
+          </a:p>
+        </p:txBody>
+      </p:sp>
+      <p:sp>
+        <p:nvSpPr>
+          <p:cNvPr id="16" name="Rectangle 15">
+            <a:extLst>
+              <a:ext uri="{FF2B5EF4-FFF2-40B4-BE49-F238E27FC236}">
+                <a16:creationId xmlns:a16="http://schemas.microsoft.com/office/drawing/2014/main" id="{C0B801A2-5622-4BE8-9AD2-C337A2CD0022}"/>
+              </a:ext>
+              <a:ext uri="{C183D7F6-B498-43B3-948B-1728B52AA6E4}">
+                <adec:decorative xmlns:adec="http://schemas.microsoft.com/office/drawing/2017/decorative" val="1"/>
+              </a:ext>
+            </a:extLst>
+          </p:cNvPr>
+          <p:cNvSpPr>
+            <a:spLocks noGrp="1" noRot="1" noChangeAspect="1" noMove="1" noResize="1" noEditPoints="1" noAdjustHandles="1" noChangeArrowheads="1" noChangeShapeType="1" noTextEdit="1"/>
+          </p:cNvSpPr>
+          <p:nvPr>
+            <p:extLst>
+              <p:ext uri="{386F3935-93C4-4BCD-93E2-E3B085C9AB24}">
+                <p16:designElem xmlns:p16="http://schemas.microsoft.com/office/powerpoint/2015/main" val="1"/>
+              </p:ext>
+            </p:extLst>
+          </p:nvPr>
+        </p:nvSpPr>
+        <p:spPr>
+          <a:xfrm>
+            <a:off x="16" y="0"/>
+            <a:ext cx="4050791" cy="6858000"/>
+          </a:xfrm>
+          <a:prstGeom prst="rect">
+            <a:avLst/>
+          </a:prstGeom>
+          <a:solidFill>
+            <a:schemeClr val="accent2"/>
+          </a:solidFill>
+          <a:ln>
+            <a:noFill/>
+          </a:ln>
+        </p:spPr>
+        <p:style>
+          <a:lnRef idx="2">
+            <a:schemeClr val="accent1">
+              <a:shade val="50000"/>
+            </a:schemeClr>
+          </a:lnRef>
+          <a:fillRef idx="1">
+            <a:schemeClr val="accent1"/>
+          </a:fillRef>
+          <a:effectRef idx="0">
+            <a:schemeClr val="accent1"/>
+          </a:effectRef>
+          <a:fontRef idx="minor">
+            <a:schemeClr val="lt1"/>
+          </a:fontRef>
+        </p:style>
+        <p:txBody>
+          <a:bodyPr/>
+          <a:lstStyle/>
+          <a:p>
+            <a:endParaRPr lang="en-US"/>
+          </a:p>
+        </p:txBody>
+      </p:sp>
+      <p:sp>
+        <p:nvSpPr>
+          <p:cNvPr id="2" name="Title 1">
+            <a:extLst>
+              <a:ext uri="{FF2B5EF4-FFF2-40B4-BE49-F238E27FC236}">
+                <a16:creationId xmlns:a16="http://schemas.microsoft.com/office/drawing/2014/main" id="{98176695-7082-49F2-AE8D-2730E307A604}"/>
+              </a:ext>
+            </a:extLst>
+          </p:cNvPr>
+          <p:cNvSpPr>
+            <a:spLocks noGrp="1"/>
+          </p:cNvSpPr>
+          <p:nvPr>
+            <p:ph type="title"/>
+          </p:nvPr>
+        </p:nvSpPr>
+        <p:spPr>
+          <a:xfrm>
+            <a:off x="492370" y="516835"/>
+            <a:ext cx="3084844" cy="5772840"/>
+          </a:xfrm>
+        </p:spPr>
+        <p:txBody>
+          <a:bodyPr anchor="ctr">
+            <a:normAutofit/>
+          </a:bodyPr>
+          <a:lstStyle/>
+          <a:p>
+            <a:r>
+              <a:rPr lang="es-MX" sz="3600">
+                <a:solidFill>
+                  <a:srgbClr val="FFFFFF"/>
+                </a:solidFill>
+              </a:rPr>
+              <a:t>Permiso de uso del espectro</a:t>
+            </a:r>
+            <a:endParaRPr lang="en-US" sz="3600">
+              <a:solidFill>
+                <a:srgbClr val="FFFFFF"/>
+              </a:solidFill>
+            </a:endParaRPr>
+          </a:p>
+        </p:txBody>
+      </p:sp>
+      <p:sp>
+        <p:nvSpPr>
+          <p:cNvPr id="17" name="Rectangle 16">
+            <a:extLst>
+              <a:ext uri="{FF2B5EF4-FFF2-40B4-BE49-F238E27FC236}">
+                <a16:creationId xmlns:a16="http://schemas.microsoft.com/office/drawing/2014/main" id="{B7AF614F-5BC3-4086-99F5-B87C5847A071}"/>
+              </a:ext>
+              <a:ext uri="{C183D7F6-B498-43B3-948B-1728B52AA6E4}">
+                <adec:decorative xmlns:adec="http://schemas.microsoft.com/office/drawing/2017/decorative" val="1"/>
+              </a:ext>
+            </a:extLst>
+          </p:cNvPr>
+          <p:cNvSpPr>
+            <a:spLocks noGrp="1" noRot="1" noChangeAspect="1" noMove="1" noResize="1" noEditPoints="1" noAdjustHandles="1" noChangeArrowheads="1" noChangeShapeType="1" noTextEdit="1"/>
+          </p:cNvSpPr>
+          <p:nvPr>
+            <p:extLst>
+              <p:ext uri="{386F3935-93C4-4BCD-93E2-E3B085C9AB24}">
+                <p16:designElem xmlns:p16="http://schemas.microsoft.com/office/powerpoint/2015/main" val="1"/>
+              </p:ext>
+            </p:extLst>
+          </p:nvPr>
+        </p:nvSpPr>
+        <p:spPr>
+          <a:xfrm>
+            <a:off x="4040071" y="0"/>
+            <a:ext cx="64008" cy="6858000"/>
+          </a:xfrm>
+          <a:prstGeom prst="rect">
+            <a:avLst/>
+          </a:prstGeom>
+          <a:solidFill>
+            <a:schemeClr val="accent1"/>
+          </a:solidFill>
+          <a:ln>
+            <a:noFill/>
+          </a:ln>
+        </p:spPr>
+        <p:style>
+          <a:lnRef idx="2">
+            <a:schemeClr val="accent1">
+              <a:shade val="50000"/>
+            </a:schemeClr>
+          </a:lnRef>
+          <a:fillRef idx="1">
+            <a:schemeClr val="accent1"/>
+          </a:fillRef>
+          <a:effectRef idx="0">
+            <a:schemeClr val="accent1"/>
+          </a:effectRef>
+          <a:fontRef idx="minor">
+            <a:schemeClr val="lt1"/>
+          </a:fontRef>
+        </p:style>
+        <p:txBody>
+          <a:bodyPr/>
+          <a:lstStyle/>
+          <a:p>
+            <a:endParaRPr lang="en-US"/>
+          </a:p>
+        </p:txBody>
+      </p:sp>
+      <p:graphicFrame>
+        <p:nvGraphicFramePr>
+          <p:cNvPr id="18" name="Content Placeholder 2">
+            <a:extLst>
+              <a:ext uri="{FF2B5EF4-FFF2-40B4-BE49-F238E27FC236}">
+                <a16:creationId xmlns:a16="http://schemas.microsoft.com/office/drawing/2014/main" id="{2594009C-9F90-6B6A-4744-9F2052CFB623}"/>
+              </a:ext>
+            </a:extLst>
+          </p:cNvPr>
+          <p:cNvGraphicFramePr>
+            <a:graphicFrameLocks noGrp="1"/>
+          </p:cNvGraphicFramePr>
+          <p:nvPr>
+            <p:ph idx="1"/>
+            <p:extLst>
+              <p:ext uri="{D42A27DB-BD31-4B8C-83A1-F6EECF244321}">
+                <p14:modId xmlns:p14="http://schemas.microsoft.com/office/powerpoint/2010/main" val="597870093"/>
+              </p:ext>
+            </p:extLst>
+          </p:nvPr>
+        </p:nvGraphicFramePr>
+        <p:xfrm>
+          <a:off x="4741863" y="639763"/>
+          <a:ext cx="6797675" cy="5649912"/>
+        </p:xfrm>
+        <a:graphic>
+          <a:graphicData uri="http://schemas.openxmlformats.org/drawingml/2006/diagram">
+            <dgm:relIds xmlns:dgm="http://schemas.openxmlformats.org/drawingml/2006/diagram" xmlns:r="http://schemas.openxmlformats.org/officeDocument/2006/relationships" r:dm="rId2" r:lo="rId3" r:qs="rId4" r:cs="rId5"/>
+          </a:graphicData>
+        </a:graphic>
+      </p:graphicFrame>
+    </p:spTree>
+    <p:extLst>
+      <p:ext uri="{BB962C8B-B14F-4D97-AF65-F5344CB8AC3E}">
+        <p14:creationId xmlns:p14="http://schemas.microsoft.com/office/powerpoint/2010/main" val="2847761339"/>
+      </p:ext>
+    </p:extLst>
+  </p:cSld>
+  <p:clrMapOvr>
+    <a:masterClrMapping/>
+  </p:clrMapOvr>
+</p:sld>
+</file>
+
+<file path=ppt/slides/slide24.xml><?xml version="1.0" encoding="utf-8"?>
+<p:sld xmlns:a="http://schemas.openxmlformats.org/drawingml/2006/main" xmlns:r="http://schemas.openxmlformats.org/officeDocument/2006/relationships" xmlns:p="http://schemas.openxmlformats.org/presentationml/2006/main">
+  <p:cSld>
+    <p:spTree>
+      <p:nvGrpSpPr>
+        <p:cNvPr id="1" name=""/>
+        <p:cNvGrpSpPr/>
+        <p:nvPr/>
+      </p:nvGrpSpPr>
+      <p:grpSpPr>
+        <a:xfrm>
+          <a:off x="0" y="0"/>
+          <a:ext cx="0" cy="0"/>
+          <a:chOff x="0" y="0"/>
+          <a:chExt cx="0" cy="0"/>
+        </a:xfrm>
+      </p:grpSpPr>
+      <p:sp>
+        <p:nvSpPr>
+          <p:cNvPr id="2" name="Title 1">
+            <a:extLst>
+              <a:ext uri="{FF2B5EF4-FFF2-40B4-BE49-F238E27FC236}">
+                <a16:creationId xmlns:a16="http://schemas.microsoft.com/office/drawing/2014/main" id="{BB105FBC-4393-6439-9677-E192AC9D60F8}"/>
+              </a:ext>
+            </a:extLst>
+          </p:cNvPr>
+          <p:cNvSpPr>
+            <a:spLocks noGrp="1"/>
+          </p:cNvSpPr>
+          <p:nvPr>
+            <p:ph type="title"/>
+          </p:nvPr>
+        </p:nvSpPr>
+        <p:spPr/>
+        <p:txBody>
+          <a:bodyPr/>
+          <a:lstStyle/>
+          <a:p>
+            <a:r>
+              <a:rPr lang="es-MX" dirty="0"/>
+              <a:t>Tiempo del trámite de licencia</a:t>
+            </a:r>
+            <a:endParaRPr lang="en-US" dirty="0"/>
+          </a:p>
+        </p:txBody>
+      </p:sp>
+      <p:sp>
+        <p:nvSpPr>
+          <p:cNvPr id="3" name="Content Placeholder 2">
+            <a:extLst>
+              <a:ext uri="{FF2B5EF4-FFF2-40B4-BE49-F238E27FC236}">
+                <a16:creationId xmlns:a16="http://schemas.microsoft.com/office/drawing/2014/main" id="{384586B0-B667-4B99-C13C-2176FBBBED60}"/>
+              </a:ext>
+            </a:extLst>
+          </p:cNvPr>
+          <p:cNvSpPr>
+            <a:spLocks noGrp="1"/>
+          </p:cNvSpPr>
+          <p:nvPr>
+            <p:ph idx="1"/>
+          </p:nvPr>
+        </p:nvSpPr>
+        <p:spPr/>
+        <p:txBody>
+          <a:bodyPr>
+            <a:normAutofit/>
+          </a:bodyPr>
+          <a:lstStyle/>
+          <a:p>
+            <a:pPr>
+              <a:buFont typeface="Arial" panose="020B0604020202020204" pitchFamily="34" charset="0"/>
+              <a:buChar char="•"/>
+            </a:pPr>
+            <a:r>
+              <a:rPr lang="es-MX" dirty="0"/>
+              <a:t>Proceso de licencia de radioaficionado</a:t>
+            </a:r>
+          </a:p>
+          <a:p>
+            <a:pPr marL="457200" indent="-457200">
+              <a:buFont typeface="+mj-lt"/>
+              <a:buAutoNum type="arabicPeriod"/>
+            </a:pPr>
+            <a:r>
+              <a:rPr lang="es-MX" dirty="0"/>
+              <a:t>Revisión de solicitud MICITT</a:t>
+            </a:r>
+          </a:p>
+          <a:p>
+            <a:pPr marL="749808" lvl="1" indent="-457200"/>
+            <a:r>
+              <a:rPr lang="es-MX" dirty="0"/>
+              <a:t>5 días hábiles	</a:t>
+            </a:r>
+          </a:p>
+          <a:p>
+            <a:pPr marL="457200" indent="-457200">
+              <a:buFont typeface="+mj-lt"/>
+              <a:buAutoNum type="arabicPeriod"/>
+            </a:pPr>
+            <a:r>
+              <a:rPr lang="es-MX" dirty="0"/>
+              <a:t>Examen SUTEL</a:t>
+            </a:r>
+          </a:p>
+          <a:p>
+            <a:pPr marL="749808" lvl="1" indent="-457200"/>
+            <a:r>
+              <a:rPr lang="es-MX" dirty="0"/>
+              <a:t>Virtual: 10 días hábiles</a:t>
+            </a:r>
+          </a:p>
+          <a:p>
+            <a:pPr marL="749808" lvl="1" indent="-457200"/>
+            <a:r>
+              <a:rPr lang="es-MX" dirty="0"/>
+              <a:t>Presencial: 20 días hábiles</a:t>
+            </a:r>
+          </a:p>
+          <a:p>
+            <a:pPr marL="457200" indent="-457200">
+              <a:buFont typeface="+mj-lt"/>
+              <a:buAutoNum type="arabicPeriod"/>
+            </a:pPr>
+            <a:r>
+              <a:rPr lang="es-MX" dirty="0"/>
+              <a:t>Resultado del examen</a:t>
+            </a:r>
+          </a:p>
+          <a:p>
+            <a:pPr marL="749808" lvl="1" indent="-457200"/>
+            <a:r>
+              <a:rPr lang="es-MX" dirty="0"/>
+              <a:t>3 días hábiles</a:t>
+            </a:r>
+          </a:p>
+          <a:p>
+            <a:pPr marL="457200" indent="-457200">
+              <a:buFont typeface="+mj-lt"/>
+              <a:buAutoNum type="arabicPeriod"/>
+            </a:pPr>
+            <a:r>
+              <a:rPr lang="es-MX" dirty="0"/>
+              <a:t>Recomendación técnica de SUTEL</a:t>
+            </a:r>
+          </a:p>
+          <a:p>
+            <a:pPr marL="749808" lvl="1" indent="-457200"/>
+            <a:r>
+              <a:rPr lang="es-MX" dirty="0"/>
+              <a:t>Hasta 45 días hábiles</a:t>
+            </a:r>
+            <a:endParaRPr lang="en-US" dirty="0"/>
+          </a:p>
+        </p:txBody>
+      </p:sp>
+    </p:spTree>
+    <p:extLst>
+      <p:ext uri="{BB962C8B-B14F-4D97-AF65-F5344CB8AC3E}">
+        <p14:creationId xmlns:p14="http://schemas.microsoft.com/office/powerpoint/2010/main" val="1533584218"/>
+      </p:ext>
+    </p:extLst>
+  </p:cSld>
+  <p:clrMapOvr>
+    <a:masterClrMapping/>
+  </p:clrMapOvr>
+</p:sld>
+</file>
+
+<file path=ppt/slides/slide25.xml><?xml version="1.0" encoding="utf-8"?>
+<p:sld xmlns:a="http://schemas.openxmlformats.org/drawingml/2006/main" xmlns:r="http://schemas.openxmlformats.org/officeDocument/2006/relationships" xmlns:p="http://schemas.openxmlformats.org/presentationml/2006/main">
+  <p:cSld>
     <p:spTree>
       <p:nvGrpSpPr>
         <p:cNvPr id="1" name=""/>
@@ -34253,7 +35366,7 @@
 </p:sld>
 </file>
 
-<file path=ppt/slides/slide21.xml><?xml version="1.0" encoding="utf-8"?>
+<file path=ppt/slides/slide26.xml><?xml version="1.0" encoding="utf-8"?>
 <p:sld xmlns:a="http://schemas.openxmlformats.org/drawingml/2006/main" xmlns:r="http://schemas.openxmlformats.org/officeDocument/2006/relationships" xmlns:p="http://schemas.openxmlformats.org/presentationml/2006/main">
   <p:cSld>
     <p:bg>
@@ -34625,7 +35738,7 @@
 </p:sld>
 </file>
 
-<file path=ppt/slides/slide22.xml><?xml version="1.0" encoding="utf-8"?>
+<file path=ppt/slides/slide27.xml><?xml version="1.0" encoding="utf-8"?>
 <p:sld xmlns:a="http://schemas.openxmlformats.org/drawingml/2006/main" xmlns:r="http://schemas.openxmlformats.org/officeDocument/2006/relationships" xmlns:p="http://schemas.openxmlformats.org/presentationml/2006/main">
   <p:cSld>
     <p:bg>
@@ -34922,7 +36035,7 @@
 </p:sld>
 </file>
 
-<file path=ppt/slides/slide23.xml><?xml version="1.0" encoding="utf-8"?>
+<file path=ppt/slides/slide28.xml><?xml version="1.0" encoding="utf-8"?>
 <p:sld xmlns:a="http://schemas.openxmlformats.org/drawingml/2006/main" xmlns:r="http://schemas.openxmlformats.org/officeDocument/2006/relationships" xmlns:p="http://schemas.openxmlformats.org/presentationml/2006/main">
   <p:cSld>
     <p:spTree>
@@ -35022,7 +36135,7 @@
 </p:sld>
 </file>
 
-<file path=ppt/slides/slide24.xml><?xml version="1.0" encoding="utf-8"?>
+<file path=ppt/slides/slide29.xml><?xml version="1.0" encoding="utf-8"?>
 <p:sld xmlns:a="http://schemas.openxmlformats.org/drawingml/2006/main" xmlns:r="http://schemas.openxmlformats.org/officeDocument/2006/relationships" xmlns:p="http://schemas.openxmlformats.org/presentationml/2006/main">
   <p:cSld>
     <p:bg>
@@ -35338,90 +36451,6 @@
 </p:sld>
 </file>
 
-<file path=ppt/slides/slide25.xml><?xml version="1.0" encoding="utf-8"?>
-<p:sld xmlns:a="http://schemas.openxmlformats.org/drawingml/2006/main" xmlns:r="http://schemas.openxmlformats.org/officeDocument/2006/relationships" xmlns:p="http://schemas.openxmlformats.org/presentationml/2006/main">
-  <p:cSld>
-    <p:spTree>
-      <p:nvGrpSpPr>
-        <p:cNvPr id="1" name=""/>
-        <p:cNvGrpSpPr/>
-        <p:nvPr/>
-      </p:nvGrpSpPr>
-      <p:grpSpPr>
-        <a:xfrm>
-          <a:off x="0" y="0"/>
-          <a:ext cx="0" cy="0"/>
-          <a:chOff x="0" y="0"/>
-          <a:chExt cx="0" cy="0"/>
-        </a:xfrm>
-      </p:grpSpPr>
-      <p:sp>
-        <p:nvSpPr>
-          <p:cNvPr id="2" name="Title 1">
-            <a:extLst>
-              <a:ext uri="{FF2B5EF4-FFF2-40B4-BE49-F238E27FC236}">
-                <a16:creationId xmlns:a16="http://schemas.microsoft.com/office/drawing/2014/main" id="{8350CCE1-A144-6CDC-B52D-4D57FBF3F647}"/>
-              </a:ext>
-            </a:extLst>
-          </p:cNvPr>
-          <p:cNvSpPr>
-            <a:spLocks noGrp="1"/>
-          </p:cNvSpPr>
-          <p:nvPr>
-            <p:ph type="title"/>
-          </p:nvPr>
-        </p:nvSpPr>
-        <p:spPr/>
-        <p:txBody>
-          <a:bodyPr/>
-          <a:lstStyle/>
-          <a:p>
-            <a:r>
-              <a:rPr lang="en-US" dirty="0" err="1"/>
-              <a:t>Conclusiones</a:t>
-            </a:r>
-            <a:endParaRPr lang="en-US" dirty="0"/>
-          </a:p>
-        </p:txBody>
-      </p:sp>
-      <p:sp>
-        <p:nvSpPr>
-          <p:cNvPr id="3" name="Content Placeholder 2">
-            <a:extLst>
-              <a:ext uri="{FF2B5EF4-FFF2-40B4-BE49-F238E27FC236}">
-                <a16:creationId xmlns:a16="http://schemas.microsoft.com/office/drawing/2014/main" id="{69E6A6B1-4BDD-FA4A-5EF0-31E653C664FE}"/>
-              </a:ext>
-            </a:extLst>
-          </p:cNvPr>
-          <p:cNvSpPr>
-            <a:spLocks noGrp="1"/>
-          </p:cNvSpPr>
-          <p:nvPr>
-            <p:ph idx="1"/>
-          </p:nvPr>
-        </p:nvSpPr>
-        <p:spPr/>
-        <p:txBody>
-          <a:bodyPr/>
-          <a:lstStyle/>
-          <a:p>
-            <a:endParaRPr lang="en-US"/>
-          </a:p>
-        </p:txBody>
-      </p:sp>
-    </p:spTree>
-    <p:extLst>
-      <p:ext uri="{BB962C8B-B14F-4D97-AF65-F5344CB8AC3E}">
-        <p14:creationId xmlns:p14="http://schemas.microsoft.com/office/powerpoint/2010/main" val="2897734008"/>
-      </p:ext>
-    </p:extLst>
-  </p:cSld>
-  <p:clrMapOvr>
-    <a:masterClrMapping/>
-  </p:clrMapOvr>
-</p:sld>
-</file>
-
 <file path=ppt/slides/slide3.xml><?xml version="1.0" encoding="utf-8"?>
 <p:sld xmlns:a="http://schemas.openxmlformats.org/drawingml/2006/main" xmlns:r="http://schemas.openxmlformats.org/officeDocument/2006/relationships" xmlns:p="http://schemas.openxmlformats.org/presentationml/2006/main">
   <p:cSld>
@@ -35711,6 +36740,203 @@
     <p:extLst>
       <p:ext uri="{BB962C8B-B14F-4D97-AF65-F5344CB8AC3E}">
         <p14:creationId xmlns:p14="http://schemas.microsoft.com/office/powerpoint/2010/main" val="1472184281"/>
+      </p:ext>
+    </p:extLst>
+  </p:cSld>
+  <p:clrMapOvr>
+    <a:masterClrMapping/>
+  </p:clrMapOvr>
+</p:sld>
+</file>
+
+<file path=ppt/slides/slide30.xml><?xml version="1.0" encoding="utf-8"?>
+<p:sld xmlns:a="http://schemas.openxmlformats.org/drawingml/2006/main" xmlns:r="http://schemas.openxmlformats.org/officeDocument/2006/relationships" xmlns:p="http://schemas.openxmlformats.org/presentationml/2006/main">
+  <p:cSld>
+    <p:spTree>
+      <p:nvGrpSpPr>
+        <p:cNvPr id="1" name=""/>
+        <p:cNvGrpSpPr/>
+        <p:nvPr/>
+      </p:nvGrpSpPr>
+      <p:grpSpPr>
+        <a:xfrm>
+          <a:off x="0" y="0"/>
+          <a:ext cx="0" cy="0"/>
+          <a:chOff x="0" y="0"/>
+          <a:chExt cx="0" cy="0"/>
+        </a:xfrm>
+      </p:grpSpPr>
+      <p:sp>
+        <p:nvSpPr>
+          <p:cNvPr id="2" name="Title 1">
+            <a:extLst>
+              <a:ext uri="{FF2B5EF4-FFF2-40B4-BE49-F238E27FC236}">
+                <a16:creationId xmlns:a16="http://schemas.microsoft.com/office/drawing/2014/main" id="{8350CCE1-A144-6CDC-B52D-4D57FBF3F647}"/>
+              </a:ext>
+            </a:extLst>
+          </p:cNvPr>
+          <p:cNvSpPr>
+            <a:spLocks noGrp="1"/>
+          </p:cNvSpPr>
+          <p:nvPr>
+            <p:ph type="title"/>
+          </p:nvPr>
+        </p:nvSpPr>
+        <p:spPr/>
+        <p:txBody>
+          <a:bodyPr/>
+          <a:lstStyle/>
+          <a:p>
+            <a:r>
+              <a:rPr lang="en-US" dirty="0" err="1"/>
+              <a:t>Conclusiones</a:t>
+            </a:r>
+            <a:endParaRPr lang="en-US" dirty="0"/>
+          </a:p>
+        </p:txBody>
+      </p:sp>
+      <p:sp>
+        <p:nvSpPr>
+          <p:cNvPr id="3" name="Content Placeholder 2">
+            <a:extLst>
+              <a:ext uri="{FF2B5EF4-FFF2-40B4-BE49-F238E27FC236}">
+                <a16:creationId xmlns:a16="http://schemas.microsoft.com/office/drawing/2014/main" id="{69E6A6B1-4BDD-FA4A-5EF0-31E653C664FE}"/>
+              </a:ext>
+            </a:extLst>
+          </p:cNvPr>
+          <p:cNvSpPr>
+            <a:spLocks noGrp="1"/>
+          </p:cNvSpPr>
+          <p:nvPr>
+            <p:ph idx="1"/>
+          </p:nvPr>
+        </p:nvSpPr>
+        <p:spPr/>
+        <p:txBody>
+          <a:bodyPr/>
+          <a:lstStyle/>
+          <a:p>
+            <a:pPr>
+              <a:buFont typeface="Arial" panose="020B0604020202020204" pitchFamily="34" charset="0"/>
+              <a:buChar char="•"/>
+            </a:pPr>
+            <a:r>
+              <a:rPr lang="en-US" dirty="0"/>
+              <a:t> Razon de </a:t>
+            </a:r>
+            <a:r>
+              <a:rPr lang="en-US" dirty="0" err="1"/>
+              <a:t>normativas</a:t>
+            </a:r>
+            <a:r>
+              <a:rPr lang="en-US" dirty="0"/>
+              <a:t> y </a:t>
+            </a:r>
+            <a:r>
+              <a:rPr lang="en-US" dirty="0" err="1"/>
+              <a:t>regulación</a:t>
+            </a:r>
+            <a:r>
+              <a:rPr lang="en-US" dirty="0"/>
+              <a:t>.</a:t>
+            </a:r>
+          </a:p>
+          <a:p>
+            <a:pPr>
+              <a:buFont typeface="Arial" panose="020B0604020202020204" pitchFamily="34" charset="0"/>
+              <a:buChar char="•"/>
+            </a:pPr>
+            <a:r>
+              <a:rPr lang="en-US" dirty="0"/>
+              <a:t> LoRa VS APRS</a:t>
+            </a:r>
+          </a:p>
+          <a:p>
+            <a:endParaRPr lang="en-US" dirty="0"/>
+          </a:p>
+        </p:txBody>
+      </p:sp>
+      <p:pic>
+        <p:nvPicPr>
+          <p:cNvPr id="6146" name="Picture 2" descr="APRS: Automatic Packet Reporting System">
+            <a:extLst>
+              <a:ext uri="{FF2B5EF4-FFF2-40B4-BE49-F238E27FC236}">
+                <a16:creationId xmlns:a16="http://schemas.microsoft.com/office/drawing/2014/main" id="{23B9929F-BFA7-26BF-3428-20060F7A944B}"/>
+              </a:ext>
+            </a:extLst>
+          </p:cNvPr>
+          <p:cNvPicPr>
+            <a:picLocks noChangeAspect="1" noChangeArrowheads="1"/>
+          </p:cNvPicPr>
+          <p:nvPr/>
+        </p:nvPicPr>
+        <p:blipFill>
+          <a:blip r:embed="rId2">
+            <a:extLst>
+              <a:ext uri="{28A0092B-C50C-407E-A947-70E740481C1C}">
+                <a14:useLocalDpi xmlns:a14="http://schemas.microsoft.com/office/drawing/2010/main" val="0"/>
+              </a:ext>
+            </a:extLst>
+          </a:blip>
+          <a:srcRect/>
+          <a:stretch>
+            <a:fillRect/>
+          </a:stretch>
+        </p:blipFill>
+        <p:spPr bwMode="auto">
+          <a:xfrm>
+            <a:off x="6512305" y="1078469"/>
+            <a:ext cx="4903257" cy="2350531"/>
+          </a:xfrm>
+          <a:prstGeom prst="rect">
+            <a:avLst/>
+          </a:prstGeom>
+          <a:noFill/>
+          <a:extLst>
+            <a:ext uri="{909E8E84-426E-40DD-AFC4-6F175D3DCCD1}">
+              <a14:hiddenFill xmlns:a14="http://schemas.microsoft.com/office/drawing/2010/main">
+                <a:solidFill>
+                  <a:srgbClr val="FFFFFF"/>
+                </a:solidFill>
+              </a14:hiddenFill>
+            </a:ext>
+          </a:extLst>
+        </p:spPr>
+      </p:pic>
+      <p:pic>
+        <p:nvPicPr>
+          <p:cNvPr id="5" name="Imagen 4">
+            <a:extLst>
+              <a:ext uri="{FF2B5EF4-FFF2-40B4-BE49-F238E27FC236}">
+                <a16:creationId xmlns:a16="http://schemas.microsoft.com/office/drawing/2014/main" id="{18FCDC17-B3A3-B97B-44FB-BF1EE359D68D}"/>
+              </a:ext>
+            </a:extLst>
+          </p:cNvPr>
+          <p:cNvPicPr>
+            <a:picLocks noChangeAspect="1"/>
+          </p:cNvPicPr>
+          <p:nvPr/>
+        </p:nvPicPr>
+        <p:blipFill>
+          <a:blip r:embed="rId3"/>
+          <a:stretch>
+            <a:fillRect/>
+          </a:stretch>
+        </p:blipFill>
+        <p:spPr>
+          <a:xfrm>
+            <a:off x="1796486" y="3429000"/>
+            <a:ext cx="4846949" cy="2736181"/>
+          </a:xfrm>
+          <a:prstGeom prst="rect">
+            <a:avLst/>
+          </a:prstGeom>
+        </p:spPr>
+      </p:pic>
+    </p:spTree>
+    <p:extLst>
+      <p:ext uri="{BB962C8B-B14F-4D97-AF65-F5344CB8AC3E}">
+        <p14:creationId xmlns:p14="http://schemas.microsoft.com/office/powerpoint/2010/main" val="2897734008"/>
       </p:ext>
     </p:extLst>
   </p:cSld>
